--- a/other/MSposter.pptx
+++ b/other/MSposter.pptx
@@ -5534,7 +5534,7 @@
         <p:spPr>
           <a:xfrm>
             <a:off x="24850213" y="4658590"/>
-            <a:ext cx="7534787" cy="6860748"/>
+            <a:ext cx="7534787" cy="5169317"/>
           </a:xfrm>
           <a:prstGeom prst="rect">
             <a:avLst/>
@@ -5757,7 +5757,7 @@
         </p:nvSpPr>
         <p:spPr>
           <a:xfrm>
-            <a:off x="24850213" y="12117693"/>
+            <a:off x="24850213" y="10263167"/>
             <a:ext cx="7534787" cy="6573023"/>
           </a:xfrm>
           <a:prstGeom prst="rect">
@@ -5842,7 +5842,74 @@
                 <a:ea typeface="Open Sans" panose="020B0606030504020204" pitchFamily="34" charset="0"/>
                 <a:cs typeface="Open Sans" panose="020B0606030504020204" pitchFamily="34" charset="0"/>
               </a:rPr>
-              <a:t>	Graph-structured data is fundamental to the world with applications ranging from social networks to biological pathways. Understanding the structural properties and visualizing these large networks is essential to our further exploration of them. This research project presents an app which allows users to </a:t>
+              <a:t>	Graph-structured data is fundamental to the world with applications ranging from </a:t>
+            </a:r>
+            <a:r>
+              <a:rPr lang="en-US" sz="2400" b="1" dirty="0">
+                <a:solidFill>
+                  <a:schemeClr val="bg2">
+                    <a:lumMod val="25000"/>
+                  </a:schemeClr>
+                </a:solidFill>
+                <a:latin typeface="Libre Baskerville" panose="02000000000000000000" pitchFamily="2" charset="0"/>
+                <a:ea typeface="Open Sans" panose="020B0606030504020204" pitchFamily="34" charset="0"/>
+                <a:cs typeface="Open Sans" panose="020B0606030504020204" pitchFamily="34" charset="0"/>
+              </a:rPr>
+              <a:t>social networks </a:t>
+            </a:r>
+            <a:r>
+              <a:rPr lang="en-US" sz="2400" dirty="0">
+                <a:solidFill>
+                  <a:schemeClr val="bg2">
+                    <a:lumMod val="25000"/>
+                  </a:schemeClr>
+                </a:solidFill>
+                <a:latin typeface="Libre Baskerville" panose="02000000000000000000" pitchFamily="2" charset="0"/>
+                <a:ea typeface="Open Sans" panose="020B0606030504020204" pitchFamily="34" charset="0"/>
+                <a:cs typeface="Open Sans" panose="020B0606030504020204" pitchFamily="34" charset="0"/>
+              </a:rPr>
+              <a:t>to </a:t>
+            </a:r>
+            <a:r>
+              <a:rPr lang="en-US" sz="2400" b="1" dirty="0">
+                <a:solidFill>
+                  <a:schemeClr val="bg2">
+                    <a:lumMod val="25000"/>
+                  </a:schemeClr>
+                </a:solidFill>
+                <a:latin typeface="Libre Baskerville" panose="02000000000000000000" pitchFamily="2" charset="0"/>
+                <a:ea typeface="Open Sans" panose="020B0606030504020204" pitchFamily="34" charset="0"/>
+                <a:cs typeface="Open Sans" panose="020B0606030504020204" pitchFamily="34" charset="0"/>
+              </a:rPr>
+              <a:t>biological pathways. </a:t>
+            </a:r>
+            <a:r>
+              <a:rPr lang="en-US" sz="2400" dirty="0">
+                <a:solidFill>
+                  <a:schemeClr val="bg2">
+                    <a:lumMod val="25000"/>
+                  </a:schemeClr>
+                </a:solidFill>
+                <a:latin typeface="Libre Baskerville" panose="02000000000000000000" pitchFamily="2" charset="0"/>
+                <a:ea typeface="Open Sans" panose="020B0606030504020204" pitchFamily="34" charset="0"/>
+                <a:cs typeface="Open Sans" panose="020B0606030504020204" pitchFamily="34" charset="0"/>
+              </a:rPr>
+              <a:t>Understanding the structural properties and visualizing these large networks is essential to our further exploration of them. </a:t>
+            </a:r>
+          </a:p>
+          <a:p>
+            <a:r>
+              <a:rPr lang="en-US" sz="2400" dirty="0">
+                <a:solidFill>
+                  <a:schemeClr val="bg2">
+                    <a:lumMod val="25000"/>
+                  </a:schemeClr>
+                </a:solidFill>
+                <a:latin typeface="Libre Baskerville" panose="02000000000000000000" pitchFamily="2" charset="0"/>
+                <a:ea typeface="Open Sans" panose="020B0606030504020204" pitchFamily="34" charset="0"/>
+                <a:cs typeface="Open Sans" panose="020B0606030504020204" pitchFamily="34" charset="0"/>
+              </a:rPr>
+              <a:t>	This research project presents an app which allows users to </a:t>
             </a:r>
             <a:r>
               <a:rPr lang="en-US" sz="2400" b="1" dirty="0">
@@ -5957,8 +6024,8 @@
         </p:nvSpPr>
         <p:spPr>
           <a:xfrm>
-            <a:off x="24850213" y="19202400"/>
-            <a:ext cx="7534787" cy="2397000"/>
+            <a:off x="24850213" y="17373600"/>
+            <a:ext cx="7534787" cy="4225800"/>
           </a:xfrm>
           <a:prstGeom prst="rect">
             <a:avLst/>
@@ -6001,10 +6068,10 @@
       </p:sp>
       <p:sp>
         <p:nvSpPr>
-          <p:cNvPr id="56" name="TextBox 55">
+          <p:cNvPr id="57" name="TextBox 56">
             <a:extLst>
               <a:ext uri="{FF2B5EF4-FFF2-40B4-BE49-F238E27FC236}">
-                <a16:creationId xmlns:a16="http://schemas.microsoft.com/office/drawing/2014/main" id="{1D434DB1-CA03-4AE7-BD42-F2F4837CE20D}"/>
+                <a16:creationId xmlns:a16="http://schemas.microsoft.com/office/drawing/2014/main" id="{992CC346-56CD-4384-BB14-A915BC781C78}"/>
               </a:ext>
             </a:extLst>
           </p:cNvPr>
@@ -6013,8 +6080,8 @@
         </p:nvSpPr>
         <p:spPr>
           <a:xfrm>
-            <a:off x="25021459" y="19800075"/>
-            <a:ext cx="7192297" cy="276999"/>
+            <a:off x="25055051" y="17838355"/>
+            <a:ext cx="7192297" cy="584775"/>
           </a:xfrm>
           <a:prstGeom prst="rect">
             <a:avLst/>
@@ -6032,105 +6099,13 @@
           </a:lstStyle>
           <a:p>
             <a:r>
-              <a:rPr lang="en-US" sz="1200">
-                <a:solidFill>
-                  <a:srgbClr val="1482A5"/>
-                </a:solidFill>
-                <a:latin typeface="Montserrat Light" panose="00000400000000000000" pitchFamily="50" charset="0"/>
-                <a:ea typeface="Open Sans" panose="020B0606030504020204" pitchFamily="34" charset="0"/>
-                <a:cs typeface="Open Sans" panose="020B0606030504020204" pitchFamily="34" charset="0"/>
-              </a:rPr>
-              <a:t>Add your information, graphs and images to this section.</a:t>
-            </a:r>
-          </a:p>
-        </p:txBody>
-      </p:sp>
-      <p:sp>
-        <p:nvSpPr>
-          <p:cNvPr id="57" name="TextBox 56">
-            <a:extLst>
-              <a:ext uri="{FF2B5EF4-FFF2-40B4-BE49-F238E27FC236}">
-                <a16:creationId xmlns:a16="http://schemas.microsoft.com/office/drawing/2014/main" id="{992CC346-56CD-4384-BB14-A915BC781C78}"/>
-              </a:ext>
-            </a:extLst>
-          </p:cNvPr>
-          <p:cNvSpPr txBox="1"/>
-          <p:nvPr/>
-        </p:nvSpPr>
-        <p:spPr>
-          <a:xfrm>
-            <a:off x="25021459" y="19354800"/>
-            <a:ext cx="7192297" cy="461665"/>
-          </a:xfrm>
-          <a:prstGeom prst="rect">
-            <a:avLst/>
-          </a:prstGeom>
-          <a:noFill/>
-        </p:spPr>
-        <p:txBody>
-          <a:bodyPr wrap="square" rtlCol="0">
-            <a:spAutoFit/>
-          </a:bodyPr>
-          <a:lstStyle>
-            <a:defPPr>
-              <a:defRPr kern="1200"/>
-            </a:defPPr>
-          </a:lstStyle>
-          <a:p>
-            <a:r>
-              <a:rPr lang="en-US" sz="2400">
+              <a:rPr lang="en-US" sz="3200" dirty="0">
                 <a:solidFill>
                   <a:srgbClr val="235078"/>
                 </a:solidFill>
                 <a:latin typeface="Libre Baskerville" panose="02000000000000000000" pitchFamily="2" charset="0"/>
               </a:rPr>
-              <a:t>Acknowledgements</a:t>
-            </a:r>
-          </a:p>
-        </p:txBody>
-      </p:sp>
-      <p:sp>
-        <p:nvSpPr>
-          <p:cNvPr id="58" name="TextBox 57">
-            <a:extLst>
-              <a:ext uri="{FF2B5EF4-FFF2-40B4-BE49-F238E27FC236}">
-                <a16:creationId xmlns:a16="http://schemas.microsoft.com/office/drawing/2014/main" id="{E3DA8D0E-1298-4193-913A-0FE766B77D13}"/>
-              </a:ext>
-            </a:extLst>
-          </p:cNvPr>
-          <p:cNvSpPr txBox="1"/>
-          <p:nvPr/>
-        </p:nvSpPr>
-        <p:spPr>
-          <a:xfrm>
-            <a:off x="25021459" y="5830075"/>
-            <a:ext cx="7192297" cy="276999"/>
-          </a:xfrm>
-          <a:prstGeom prst="rect">
-            <a:avLst/>
-          </a:prstGeom>
-          <a:noFill/>
-        </p:spPr>
-        <p:txBody>
-          <a:bodyPr wrap="square" rtlCol="0">
-            <a:spAutoFit/>
-          </a:bodyPr>
-          <a:lstStyle>
-            <a:defPPr>
-              <a:defRPr kern="1200"/>
-            </a:defPPr>
-          </a:lstStyle>
-          <a:p>
-            <a:r>
-              <a:rPr lang="en-US" sz="1200" dirty="0">
-                <a:solidFill>
-                  <a:srgbClr val="1482A5"/>
-                </a:solidFill>
-                <a:latin typeface="Montserrat Light" panose="00000400000000000000" pitchFamily="50" charset="0"/>
-                <a:ea typeface="Open Sans" panose="020B0606030504020204" pitchFamily="34" charset="0"/>
-                <a:cs typeface="Open Sans" panose="020B0606030504020204" pitchFamily="34" charset="0"/>
-              </a:rPr>
-              <a:t>Add your information, graphs and images to this section.</a:t>
+              <a:t>References</a:t>
             </a:r>
           </a:p>
         </p:txBody>
@@ -6150,7 +6125,7 @@
         <p:spPr>
           <a:xfrm>
             <a:off x="25026375" y="4862154"/>
-            <a:ext cx="7192297" cy="461665"/>
+            <a:ext cx="7192297" cy="584775"/>
           </a:xfrm>
           <a:prstGeom prst="rect">
             <a:avLst/>
@@ -6168,59 +6143,13 @@
           </a:lstStyle>
           <a:p>
             <a:r>
-              <a:rPr lang="en-US" sz="2400">
+              <a:rPr lang="en-US" sz="3200" dirty="0">
                 <a:solidFill>
                   <a:srgbClr val="235078"/>
                 </a:solidFill>
                 <a:latin typeface="Libre Baskerville" panose="02000000000000000000" pitchFamily="2" charset="0"/>
               </a:rPr>
               <a:t>Conclusion</a:t>
-            </a:r>
-          </a:p>
-        </p:txBody>
-      </p:sp>
-      <p:sp>
-        <p:nvSpPr>
-          <p:cNvPr id="60" name="TextBox 59">
-            <a:extLst>
-              <a:ext uri="{FF2B5EF4-FFF2-40B4-BE49-F238E27FC236}">
-                <a16:creationId xmlns:a16="http://schemas.microsoft.com/office/drawing/2014/main" id="{22B0201C-B275-4172-AE5F-42B6EA405F41}"/>
-              </a:ext>
-            </a:extLst>
-          </p:cNvPr>
-          <p:cNvSpPr txBox="1"/>
-          <p:nvPr/>
-        </p:nvSpPr>
-        <p:spPr>
-          <a:xfrm>
-            <a:off x="25021459" y="12767014"/>
-            <a:ext cx="7192297" cy="276999"/>
-          </a:xfrm>
-          <a:prstGeom prst="rect">
-            <a:avLst/>
-          </a:prstGeom>
-          <a:noFill/>
-        </p:spPr>
-        <p:txBody>
-          <a:bodyPr wrap="square" rtlCol="0">
-            <a:spAutoFit/>
-          </a:bodyPr>
-          <a:lstStyle>
-            <a:defPPr>
-              <a:defRPr kern="1200"/>
-            </a:defPPr>
-          </a:lstStyle>
-          <a:p>
-            <a:r>
-              <a:rPr lang="en-US" sz="1200">
-                <a:solidFill>
-                  <a:srgbClr val="1482A5"/>
-                </a:solidFill>
-                <a:latin typeface="Montserrat Light" panose="00000400000000000000" pitchFamily="50" charset="0"/>
-                <a:ea typeface="Open Sans" panose="020B0606030504020204" pitchFamily="34" charset="0"/>
-                <a:cs typeface="Open Sans" panose="020B0606030504020204" pitchFamily="34" charset="0"/>
-              </a:rPr>
-              <a:t>Add your information, graphs and images to this section.</a:t>
             </a:r>
           </a:p>
         </p:txBody>
@@ -6239,8 +6168,8 @@
         </p:nvSpPr>
         <p:spPr>
           <a:xfrm>
-            <a:off x="25021459" y="12321739"/>
-            <a:ext cx="7192297" cy="461665"/>
+            <a:off x="25004042" y="10388025"/>
+            <a:ext cx="7192297" cy="584775"/>
           </a:xfrm>
           <a:prstGeom prst="rect">
             <a:avLst/>
@@ -6258,7 +6187,7 @@
           </a:lstStyle>
           <a:p>
             <a:r>
-              <a:rPr lang="en-US" sz="2400" dirty="0">
+              <a:rPr lang="en-US" sz="3200" dirty="0">
                 <a:solidFill>
                   <a:srgbClr val="235078"/>
                 </a:solidFill>
@@ -6403,10 +6332,10 @@
       </p:sp>
       <p:sp>
         <p:nvSpPr>
-          <p:cNvPr id="68" name="TextBox 67">
+          <p:cNvPr id="69" name="TextBox 68">
             <a:extLst>
               <a:ext uri="{FF2B5EF4-FFF2-40B4-BE49-F238E27FC236}">
-                <a16:creationId xmlns:a16="http://schemas.microsoft.com/office/drawing/2014/main" id="{47F717BC-0897-4243-A282-98EF911708EA}"/>
+                <a16:creationId xmlns:a16="http://schemas.microsoft.com/office/drawing/2014/main" id="{27A0BB3C-427E-42CA-963C-DA612C8F2B9C}"/>
               </a:ext>
             </a:extLst>
           </p:cNvPr>
@@ -6415,8 +6344,8 @@
         </p:nvSpPr>
         <p:spPr>
           <a:xfrm>
-            <a:off x="16915854" y="5830076"/>
-            <a:ext cx="7192297" cy="276999"/>
+            <a:off x="16915853" y="4821063"/>
+            <a:ext cx="7192297" cy="584775"/>
           </a:xfrm>
           <a:prstGeom prst="rect">
             <a:avLst/>
@@ -6434,59 +6363,13 @@
           </a:lstStyle>
           <a:p>
             <a:r>
-              <a:rPr lang="en-US" sz="1200">
-                <a:solidFill>
-                  <a:srgbClr val="1482A5"/>
-                </a:solidFill>
-                <a:latin typeface="Montserrat Light" panose="00000400000000000000" pitchFamily="50" charset="0"/>
-                <a:ea typeface="Open Sans" panose="020B0606030504020204" pitchFamily="34" charset="0"/>
-                <a:cs typeface="Open Sans" panose="020B0606030504020204" pitchFamily="34" charset="0"/>
-              </a:rPr>
-              <a:t>Add your information, graphs and images to this section.</a:t>
-            </a:r>
-          </a:p>
-        </p:txBody>
-      </p:sp>
-      <p:sp>
-        <p:nvSpPr>
-          <p:cNvPr id="69" name="TextBox 68">
-            <a:extLst>
-              <a:ext uri="{FF2B5EF4-FFF2-40B4-BE49-F238E27FC236}">
-                <a16:creationId xmlns:a16="http://schemas.microsoft.com/office/drawing/2014/main" id="{27A0BB3C-427E-42CA-963C-DA612C8F2B9C}"/>
-              </a:ext>
-            </a:extLst>
-          </p:cNvPr>
-          <p:cNvSpPr txBox="1"/>
-          <p:nvPr/>
-        </p:nvSpPr>
-        <p:spPr>
-          <a:xfrm>
-            <a:off x="16915854" y="5384801"/>
-            <a:ext cx="7192297" cy="461665"/>
-          </a:xfrm>
-          <a:prstGeom prst="rect">
-            <a:avLst/>
-          </a:prstGeom>
-          <a:noFill/>
-        </p:spPr>
-        <p:txBody>
-          <a:bodyPr wrap="square" rtlCol="0">
-            <a:spAutoFit/>
-          </a:bodyPr>
-          <a:lstStyle>
-            <a:defPPr>
-              <a:defRPr kern="1200"/>
-            </a:defPPr>
-          </a:lstStyle>
-          <a:p>
-            <a:r>
-              <a:rPr lang="en-US" sz="2400">
+              <a:rPr lang="en-US" sz="3200" dirty="0">
                 <a:solidFill>
                   <a:srgbClr val="235078"/>
                 </a:solidFill>
                 <a:latin typeface="Libre Baskerville" panose="02000000000000000000" pitchFamily="2" charset="0"/>
               </a:rPr>
-              <a:t>Results</a:t>
+              <a:t>Visualization Algorithms</a:t>
             </a:r>
           </a:p>
         </p:txBody>
@@ -6578,7 +6461,7 @@
         <p:spPr>
           <a:xfrm>
             <a:off x="8844662" y="5477131"/>
-            <a:ext cx="7192297" cy="4524315"/>
+            <a:ext cx="7192297" cy="4893647"/>
           </a:xfrm>
           <a:prstGeom prst="rect">
             <a:avLst/>
@@ -6595,8 +6478,12 @@
             </a:defPPr>
           </a:lstStyle>
           <a:p>
-            <a:r>
-              <a:rPr lang="en-US" sz="2400" dirty="0">
+            <a:pPr marL="342900" indent="-342900">
+              <a:buFont typeface="Arial" panose="020B0604020202020204" pitchFamily="34" charset="0"/>
+              <a:buChar char="•"/>
+            </a:pPr>
+            <a:r>
+              <a:rPr lang="en-US" sz="2400" b="1" dirty="0">
                 <a:solidFill>
                   <a:schemeClr val="bg2">
                     <a:lumMod val="25000"/>
@@ -6606,10 +6493,10 @@
                 <a:ea typeface="Open Sans" panose="020B0606030504020204" pitchFamily="34" charset="0"/>
                 <a:cs typeface="Open Sans" panose="020B0606030504020204" pitchFamily="34" charset="0"/>
               </a:rPr>
-              <a:t>	Several tools currently exist for graph visualization and analysis. </a:t>
-            </a:r>
-            <a:r>
-              <a:rPr lang="en-US" sz="2400" b="1" dirty="0">
+              <a:t>Gephi</a:t>
+            </a:r>
+            <a:r>
+              <a:rPr lang="en-US" sz="2400" dirty="0">
                 <a:solidFill>
                   <a:schemeClr val="bg2">
                     <a:lumMod val="25000"/>
@@ -6619,10 +6506,16 @@
                 <a:ea typeface="Open Sans" panose="020B0606030504020204" pitchFamily="34" charset="0"/>
                 <a:cs typeface="Open Sans" panose="020B0606030504020204" pitchFamily="34" charset="0"/>
               </a:rPr>
-              <a:t>Gephi</a:t>
-            </a:r>
-            <a:r>
-              <a:rPr lang="en-US" sz="2400" dirty="0">
+              <a:t> is widely used for graph analysis offering a wide variety of visual statistics.</a:t>
+            </a:r>
+          </a:p>
+          <a:p>
+            <a:pPr marL="342900" indent="-342900">
+              <a:buFont typeface="Arial" panose="020B0604020202020204" pitchFamily="34" charset="0"/>
+              <a:buChar char="•"/>
+            </a:pPr>
+            <a:r>
+              <a:rPr lang="en-US" sz="2400" b="1" dirty="0" err="1">
                 <a:solidFill>
                   <a:schemeClr val="bg2">
                     <a:lumMod val="25000"/>
@@ -6632,10 +6525,10 @@
                 <a:ea typeface="Open Sans" panose="020B0606030504020204" pitchFamily="34" charset="0"/>
                 <a:cs typeface="Open Sans" panose="020B0606030504020204" pitchFamily="34" charset="0"/>
               </a:rPr>
-              <a:t> is widely used for graph analysis offering a wide variety of visual statistics. </a:t>
-            </a:r>
-            <a:r>
-              <a:rPr lang="en-US" sz="2400" b="1" dirty="0" err="1">
+              <a:t>GraphViz</a:t>
+            </a:r>
+            <a:r>
+              <a:rPr lang="en-US" sz="2400" dirty="0">
                 <a:solidFill>
                   <a:schemeClr val="bg2">
                     <a:lumMod val="25000"/>
@@ -6645,8 +6538,10 @@
                 <a:ea typeface="Open Sans" panose="020B0606030504020204" pitchFamily="34" charset="0"/>
                 <a:cs typeface="Open Sans" panose="020B0606030504020204" pitchFamily="34" charset="0"/>
               </a:rPr>
-              <a:t>GraphViz</a:t>
-            </a:r>
+              <a:t> focuses on graphing layouts with a scripting interface but lacks a user interface. </a:t>
+            </a:r>
+          </a:p>
+          <a:p>
             <a:r>
               <a:rPr lang="en-US" sz="2400" dirty="0">
                 <a:solidFill>
@@ -6658,7 +6553,7 @@
                 <a:ea typeface="Open Sans" panose="020B0606030504020204" pitchFamily="34" charset="0"/>
                 <a:cs typeface="Open Sans" panose="020B0606030504020204" pitchFamily="34" charset="0"/>
               </a:rPr>
-              <a:t> focuses on graphing layouts with a scripting interface, but lacks a user interface. 	</a:t>
+              <a:t>	</a:t>
             </a:r>
             <a:r>
               <a:rPr lang="en-US" sz="2400" b="1" dirty="0" err="1">
@@ -6684,8 +6579,108 @@
                 <a:ea typeface="Open Sans" panose="020B0606030504020204" pitchFamily="34" charset="0"/>
                 <a:cs typeface="Open Sans" panose="020B0606030504020204" pitchFamily="34" charset="0"/>
               </a:rPr>
-              <a:t> draws inspiration from these tools targeting an interactive and accessible experience for the user. Some further similarities include a graph representation table which shows the nodes and edges which are in a graph. </a:t>
-            </a:r>
+              <a:t> draws inspiration from these tools targeting an interactive and accessible experience for the user. A couple of </a:t>
+            </a:r>
+            <a:r>
+              <a:rPr lang="en-US" sz="2400" b="1" dirty="0" err="1">
+                <a:solidFill>
+                  <a:schemeClr val="bg2">
+                    <a:lumMod val="25000"/>
+                  </a:schemeClr>
+                </a:solidFill>
+                <a:latin typeface="Libre Baskerville" panose="02000000000000000000" pitchFamily="2" charset="0"/>
+                <a:ea typeface="Open Sans" panose="020B0606030504020204" pitchFamily="34" charset="0"/>
+                <a:cs typeface="Open Sans" panose="020B0606030504020204" pitchFamily="34" charset="0"/>
+              </a:rPr>
+              <a:t>NetSim</a:t>
+            </a:r>
+            <a:r>
+              <a:rPr lang="en-US" sz="2400" dirty="0">
+                <a:solidFill>
+                  <a:schemeClr val="bg2">
+                    <a:lumMod val="25000"/>
+                  </a:schemeClr>
+                </a:solidFill>
+                <a:latin typeface="Libre Baskerville" panose="02000000000000000000" pitchFamily="2" charset="0"/>
+                <a:ea typeface="Open Sans" panose="020B0606030504020204" pitchFamily="34" charset="0"/>
+                <a:cs typeface="Open Sans" panose="020B0606030504020204" pitchFamily="34" charset="0"/>
+              </a:rPr>
+              <a:t> features include:</a:t>
+            </a:r>
+          </a:p>
+          <a:p>
+            <a:pPr marL="342900" indent="-342900">
+              <a:buFont typeface="Arial" panose="020B0604020202020204" pitchFamily="34" charset="0"/>
+              <a:buChar char="•"/>
+            </a:pPr>
+            <a:r>
+              <a:rPr lang="en-US" sz="2400" b="1" dirty="0">
+                <a:solidFill>
+                  <a:schemeClr val="bg2">
+                    <a:lumMod val="25000"/>
+                  </a:schemeClr>
+                </a:solidFill>
+                <a:latin typeface="Libre Baskerville" panose="02000000000000000000" pitchFamily="2" charset="0"/>
+                <a:ea typeface="Open Sans" panose="020B0606030504020204" pitchFamily="34" charset="0"/>
+                <a:cs typeface="Open Sans" panose="020B0606030504020204" pitchFamily="34" charset="0"/>
+              </a:rPr>
+              <a:t>Representation table</a:t>
+            </a:r>
+            <a:r>
+              <a:rPr lang="en-US" sz="2400" dirty="0">
+                <a:solidFill>
+                  <a:schemeClr val="bg2">
+                    <a:lumMod val="25000"/>
+                  </a:schemeClr>
+                </a:solidFill>
+                <a:latin typeface="Libre Baskerville" panose="02000000000000000000" pitchFamily="2" charset="0"/>
+                <a:ea typeface="Open Sans" panose="020B0606030504020204" pitchFamily="34" charset="0"/>
+                <a:cs typeface="Open Sans" panose="020B0606030504020204" pitchFamily="34" charset="0"/>
+              </a:rPr>
+              <a:t> which shows the nodes and edges which are in a graph. </a:t>
+            </a:r>
+          </a:p>
+          <a:p>
+            <a:pPr marL="342900" indent="-342900">
+              <a:buFont typeface="Arial" panose="020B0604020202020204" pitchFamily="34" charset="0"/>
+              <a:buChar char="•"/>
+            </a:pPr>
+            <a:r>
+              <a:rPr lang="en-US" sz="2400" b="1" dirty="0">
+                <a:solidFill>
+                  <a:schemeClr val="bg2">
+                    <a:lumMod val="25000"/>
+                  </a:schemeClr>
+                </a:solidFill>
+                <a:latin typeface="Libre Baskerville" panose="02000000000000000000" pitchFamily="2" charset="0"/>
+                <a:ea typeface="Open Sans" panose="020B0606030504020204" pitchFamily="34" charset="0"/>
+                <a:cs typeface="Open Sans" panose="020B0606030504020204" pitchFamily="34" charset="0"/>
+              </a:rPr>
+              <a:t>Algorithm panel</a:t>
+            </a:r>
+            <a:r>
+              <a:rPr lang="en-US" sz="2400" dirty="0">
+                <a:solidFill>
+                  <a:schemeClr val="bg2">
+                    <a:lumMod val="25000"/>
+                  </a:schemeClr>
+                </a:solidFill>
+                <a:latin typeface="Libre Baskerville" panose="02000000000000000000" pitchFamily="2" charset="0"/>
+                <a:ea typeface="Open Sans" panose="020B0606030504020204" pitchFamily="34" charset="0"/>
+                <a:cs typeface="Open Sans" panose="020B0606030504020204" pitchFamily="34" charset="0"/>
+              </a:rPr>
+              <a:t> where the user can select algorithms to run on the graph </a:t>
+            </a:r>
+            <a:endParaRPr lang="en-US" sz="2400" b="1" dirty="0">
+              <a:solidFill>
+                <a:schemeClr val="bg2">
+                  <a:lumMod val="25000"/>
+                </a:schemeClr>
+              </a:solidFill>
+              <a:latin typeface="Libre Baskerville" panose="02000000000000000000" pitchFamily="2" charset="0"/>
+              <a:ea typeface="Open Sans" panose="020B0606030504020204" pitchFamily="34" charset="0"/>
+              <a:cs typeface="Open Sans" panose="020B0606030504020204" pitchFamily="34" charset="0"/>
+            </a:endParaRPr>
           </a:p>
         </p:txBody>
       </p:sp>
@@ -6743,8 +6738,14 @@
                 </a:solidFill>
                 <a:latin typeface="Libre Baskerville" panose="02000000000000000000" pitchFamily="2" charset="0"/>
               </a:rPr>
-              <a:t>There are several common ways to represent a graph in code. An </a:t>
-            </a:r>
+              <a:t>There are several common ways to represent a graph in code. </a:t>
+            </a:r>
+          </a:p>
+          <a:p>
+            <a:pPr marL="342900" indent="-342900">
+              <a:buFont typeface="Arial" panose="020B0604020202020204" pitchFamily="34" charset="0"/>
+              <a:buChar char="•"/>
+            </a:pPr>
             <a:r>
               <a:rPr lang="en-US" sz="2400" b="1" dirty="0">
                 <a:solidFill>
@@ -6754,7 +6755,7 @@
                 </a:solidFill>
                 <a:latin typeface="Libre Baskerville" panose="02000000000000000000" pitchFamily="2" charset="0"/>
               </a:rPr>
-              <a:t>adjacency</a:t>
+              <a:t>Adjacency</a:t>
             </a:r>
             <a:r>
               <a:rPr lang="en-US" sz="2400" dirty="0">
@@ -6787,7 +6788,7 @@
                 </a:solidFill>
                 <a:latin typeface="Libre Baskerville" panose="02000000000000000000" pitchFamily="2" charset="0"/>
               </a:rPr>
-              <a:t> stores edge relationships in an </a:t>
+              <a:t> – edges in a </a:t>
             </a:r>
             <a:r>
               <a:rPr lang="en-US" sz="2400" dirty="0" err="1">
@@ -6809,20 +6810,48 @@
                 </a:solidFill>
                 <a:latin typeface="Libre Baskerville" panose="02000000000000000000" pitchFamily="2" charset="0"/>
               </a:rPr>
+              <a:t> Boolean grid. Simple to query but fails with large graphs. </a:t>
+            </a:r>
+          </a:p>
+          <a:p>
+            <a:pPr marL="342900" indent="-342900">
+              <a:buFont typeface="Arial" panose="020B0604020202020204" pitchFamily="34" charset="0"/>
+              <a:buChar char="•"/>
+            </a:pPr>
+            <a:r>
+              <a:rPr lang="en-US" sz="2400" b="1" dirty="0">
+                <a:solidFill>
+                  <a:schemeClr val="bg2">
+                    <a:lumMod val="25000"/>
+                  </a:schemeClr>
+                </a:solidFill>
+                <a:latin typeface="Libre Baskerville" panose="02000000000000000000" pitchFamily="2" charset="0"/>
+              </a:rPr>
+              <a:t>Adjacency list </a:t>
+            </a:r>
+            <a:r>
+              <a:rPr lang="en-US" sz="2400" dirty="0">
+                <a:solidFill>
+                  <a:schemeClr val="bg2">
+                    <a:lumMod val="25000"/>
+                  </a:schemeClr>
+                </a:solidFill>
+                <a:latin typeface="Libre Baskerville" panose="02000000000000000000" pitchFamily="2" charset="0"/>
+              </a:rPr>
+              <a:t>–</a:t>
+            </a:r>
+            <a:r>
+              <a:rPr lang="en-US" sz="2400" b="1" dirty="0">
+                <a:solidFill>
+                  <a:schemeClr val="bg2">
+                    <a:lumMod val="25000"/>
+                  </a:schemeClr>
+                </a:solidFill>
+                <a:latin typeface="Libre Baskerville" panose="02000000000000000000" pitchFamily="2" charset="0"/>
+              </a:rPr>
               <a:t> </a:t>
             </a:r>
             <a:r>
-              <a:rPr lang="en-US" sz="2400" dirty="0" err="1">
-                <a:solidFill>
-                  <a:schemeClr val="bg2">
-                    <a:lumMod val="25000"/>
-                  </a:schemeClr>
-                </a:solidFill>
-                <a:latin typeface="Libre Baskerville" panose="02000000000000000000" pitchFamily="2" charset="0"/>
-              </a:rPr>
-              <a:t>boolean</a:t>
-            </a:r>
-            <a:r>
               <a:rPr lang="en-US" sz="2400" dirty="0">
                 <a:solidFill>
                   <a:schemeClr val="bg2">
@@ -6831,54 +6860,16 @@
                 </a:solidFill>
                 <a:latin typeface="Libre Baskerville" panose="02000000000000000000" pitchFamily="2" charset="0"/>
               </a:rPr>
-              <a:t> grid. Simple to query, but </a:t>
-            </a:r>
+              <a:t>storing only existing edges per node but has a slow edge look up.</a:t>
+            </a:r>
+          </a:p>
+          <a:p>
+            <a:pPr marL="342900" indent="-342900">
+              <a:buFont typeface="Arial" panose="020B0604020202020204" pitchFamily="34" charset="0"/>
+              <a:buChar char="•"/>
+            </a:pPr>
             <a:r>
               <a:rPr lang="en-US" sz="2400" b="1" dirty="0">
-                <a:solidFill>
-                  <a:schemeClr val="bg2">
-                    <a:lumMod val="25000"/>
-                  </a:schemeClr>
-                </a:solidFill>
-                <a:latin typeface="Libre Baskerville" panose="02000000000000000000" pitchFamily="2" charset="0"/>
-              </a:rPr>
-              <a:t>O(N²) </a:t>
-            </a:r>
-            <a:r>
-              <a:rPr lang="en-US" sz="2400" dirty="0">
-                <a:solidFill>
-                  <a:schemeClr val="bg2">
-                    <a:lumMod val="25000"/>
-                  </a:schemeClr>
-                </a:solidFill>
-                <a:latin typeface="Libre Baskerville" panose="02000000000000000000" pitchFamily="2" charset="0"/>
-              </a:rPr>
-              <a:t>in memory, making it impractical for large graphs. An </a:t>
-            </a:r>
-            <a:r>
-              <a:rPr lang="en-US" sz="2400" b="1" dirty="0">
-                <a:solidFill>
-                  <a:schemeClr val="bg2">
-                    <a:lumMod val="25000"/>
-                  </a:schemeClr>
-                </a:solidFill>
-                <a:latin typeface="Libre Baskerville" panose="02000000000000000000" pitchFamily="2" charset="0"/>
-              </a:rPr>
-              <a:t>adjacency list </a:t>
-            </a:r>
-            <a:r>
-              <a:rPr lang="en-US" sz="2400" dirty="0">
-                <a:solidFill>
-                  <a:schemeClr val="bg2">
-                    <a:lumMod val="25000"/>
-                  </a:schemeClr>
-                </a:solidFill>
-                <a:latin typeface="Libre Baskerville" panose="02000000000000000000" pitchFamily="2" charset="0"/>
-              </a:rPr>
-              <a:t>improves on this by storing only existing edges per node, but has a slow edge look up. For a tool designed to handle large real-world networks, neither approach is ideal.</a:t>
-            </a:r>
-            <a:r>
-              <a:rPr lang="en-US" sz="2400" dirty="0">
                 <a:solidFill>
                   <a:schemeClr val="bg2">
                     <a:lumMod val="25000"/>
@@ -6888,10 +6879,8 @@
                 <a:ea typeface="Open Sans" panose="020B0606030504020204" pitchFamily="34" charset="0"/>
                 <a:cs typeface="Open Sans" panose="020B0606030504020204" pitchFamily="34" charset="0"/>
               </a:rPr>
-              <a:t>	</a:t>
-            </a:r>
-          </a:p>
-          <a:p>
+              <a:t>Packed Memory Array </a:t>
+            </a:r>
             <a:r>
               <a:rPr lang="en-US" sz="2400" dirty="0">
                 <a:solidFill>
@@ -6903,10 +6892,21 @@
                 <a:ea typeface="Open Sans" panose="020B0606030504020204" pitchFamily="34" charset="0"/>
                 <a:cs typeface="Open Sans" panose="020B0606030504020204" pitchFamily="34" charset="0"/>
               </a:rPr>
-              <a:t>	The solution is a Pack Memory Array (</a:t>
-            </a:r>
-            <a:r>
-              <a:rPr lang="en-US" sz="2400" b="1" dirty="0">
+              <a:t>(PMA) </a:t>
+            </a:r>
+            <a:r>
+              <a:rPr lang="en-US" sz="2400" dirty="0">
+                <a:solidFill>
+                  <a:schemeClr val="bg2">
+                    <a:lumMod val="25000"/>
+                  </a:schemeClr>
+                </a:solidFill>
+                <a:latin typeface="Libre Baskerville" panose="02000000000000000000" pitchFamily="2" charset="0"/>
+              </a:rPr>
+              <a:t>–</a:t>
+            </a:r>
+            <a:r>
+              <a:rPr lang="en-US" sz="2400" dirty="0">
                 <a:solidFill>
                   <a:schemeClr val="bg2">
                     <a:lumMod val="25000"/>
@@ -6916,8 +6916,10 @@
                 <a:ea typeface="Open Sans" panose="020B0606030504020204" pitchFamily="34" charset="0"/>
                 <a:cs typeface="Open Sans" panose="020B0606030504020204" pitchFamily="34" charset="0"/>
               </a:rPr>
-              <a:t>PMA</a:t>
-            </a:r>
+              <a:t> single block of memory which holds all edge information. Best solution for large graphs.</a:t>
+            </a:r>
+          </a:p>
+          <a:p>
             <a:r>
               <a:rPr lang="en-US" sz="2400" dirty="0">
                 <a:solidFill>
@@ -6929,7 +6931,7 @@
                 <a:ea typeface="Open Sans" panose="020B0606030504020204" pitchFamily="34" charset="0"/>
                 <a:cs typeface="Open Sans" panose="020B0606030504020204" pitchFamily="34" charset="0"/>
               </a:rPr>
-              <a:t>) a single block of memory which holds all edge information. We start with 2 lists, one holding nodes and the other holding edges. Each node can be found based on its index/ID and holds 2 integers: an </a:t>
+              <a:t>	The backend consists of </a:t>
             </a:r>
             <a:r>
               <a:rPr lang="en-US" sz="2400" b="1" dirty="0">
@@ -6942,7 +6944,7 @@
                 <a:ea typeface="Open Sans" panose="020B0606030504020204" pitchFamily="34" charset="0"/>
                 <a:cs typeface="Open Sans" panose="020B0606030504020204" pitchFamily="34" charset="0"/>
               </a:rPr>
-              <a:t>edge index </a:t>
+              <a:t>2 lists</a:t>
             </a:r>
             <a:r>
               <a:rPr lang="en-US" sz="2400" dirty="0">
@@ -6955,7 +6957,7 @@
                 <a:ea typeface="Open Sans" panose="020B0606030504020204" pitchFamily="34" charset="0"/>
                 <a:cs typeface="Open Sans" panose="020B0606030504020204" pitchFamily="34" charset="0"/>
               </a:rPr>
-              <a:t>pointing to the start of its edges in the edge list and a </a:t>
+              <a:t>, one holding nodes and the other holding edges. Each node can be found based on its index/ID and holds 2 integers: an </a:t>
             </a:r>
             <a:r>
               <a:rPr lang="en-US" sz="2400" b="1" dirty="0">
@@ -6968,7 +6970,7 @@
                 <a:ea typeface="Open Sans" panose="020B0606030504020204" pitchFamily="34" charset="0"/>
                 <a:cs typeface="Open Sans" panose="020B0606030504020204" pitchFamily="34" charset="0"/>
               </a:rPr>
-              <a:t>degree</a:t>
+              <a:t>edge index </a:t>
             </a:r>
             <a:r>
               <a:rPr lang="en-US" sz="2400" dirty="0">
@@ -6981,7 +6983,7 @@
                 <a:ea typeface="Open Sans" panose="020B0606030504020204" pitchFamily="34" charset="0"/>
                 <a:cs typeface="Open Sans" panose="020B0606030504020204" pitchFamily="34" charset="0"/>
               </a:rPr>
-              <a:t> indicating how many edges it has. Edges are simply 1 integer which holds its destination nodes ID and a label. Edges are sorted which allows for a </a:t>
+              <a:t>pointing to the start of its edges in the edge list and a </a:t>
             </a:r>
             <a:r>
               <a:rPr lang="en-US" sz="2400" b="1" dirty="0">
@@ -6994,7 +6996,7 @@
                 <a:ea typeface="Open Sans" panose="020B0606030504020204" pitchFamily="34" charset="0"/>
                 <a:cs typeface="Open Sans" panose="020B0606030504020204" pitchFamily="34" charset="0"/>
               </a:rPr>
-              <a:t>binary look-up (O(log deg)). </a:t>
+              <a:t>degree</a:t>
             </a:r>
             <a:r>
               <a:rPr lang="en-US" sz="2400" dirty="0">
@@ -7007,7 +7009,7 @@
                 <a:ea typeface="Open Sans" panose="020B0606030504020204" pitchFamily="34" charset="0"/>
                 <a:cs typeface="Open Sans" panose="020B0606030504020204" pitchFamily="34" charset="0"/>
               </a:rPr>
-              <a:t>Each node is also allocated </a:t>
+              <a:t> indicating how many edges it has. Edges are simply 1 integer which holds its destination node’s ID and a label. Edges are sorted which allows for a </a:t>
             </a:r>
             <a:r>
               <a:rPr lang="en-US" sz="2400" b="1" dirty="0">
@@ -7020,7 +7022,7 @@
                 <a:ea typeface="Open Sans" panose="020B0606030504020204" pitchFamily="34" charset="0"/>
                 <a:cs typeface="Open Sans" panose="020B0606030504020204" pitchFamily="34" charset="0"/>
               </a:rPr>
-              <a:t>additional space </a:t>
+              <a:t>binary look-up (O(log deg)). </a:t>
             </a:r>
             <a:r>
               <a:rPr lang="en-US" sz="2400" dirty="0">
@@ -7033,41 +7035,37 @@
                 <a:ea typeface="Open Sans" panose="020B0606030504020204" pitchFamily="34" charset="0"/>
                 <a:cs typeface="Open Sans" panose="020B0606030504020204" pitchFamily="34" charset="0"/>
               </a:rPr>
+              <a:t>Each node is also allocated </a:t>
+            </a:r>
+            <a:r>
+              <a:rPr lang="en-US" sz="2400" b="1" dirty="0">
+                <a:solidFill>
+                  <a:schemeClr val="bg2">
+                    <a:lumMod val="25000"/>
+                  </a:schemeClr>
+                </a:solidFill>
+                <a:latin typeface="Libre Baskerville" panose="02000000000000000000" pitchFamily="2" charset="0"/>
+                <a:ea typeface="Open Sans" panose="020B0606030504020204" pitchFamily="34" charset="0"/>
+                <a:cs typeface="Open Sans" panose="020B0606030504020204" pitchFamily="34" charset="0"/>
+              </a:rPr>
+              <a:t>additional space </a:t>
+            </a:r>
+            <a:r>
+              <a:rPr lang="en-US" sz="2400" dirty="0">
+                <a:solidFill>
+                  <a:schemeClr val="bg2">
+                    <a:lumMod val="25000"/>
+                  </a:schemeClr>
+                </a:solidFill>
+                <a:latin typeface="Libre Baskerville" panose="02000000000000000000" pitchFamily="2" charset="0"/>
+                <a:ea typeface="Open Sans" panose="020B0606030504020204" pitchFamily="34" charset="0"/>
+                <a:cs typeface="Open Sans" panose="020B0606030504020204" pitchFamily="34" charset="0"/>
+              </a:rPr>
               <a:t>within the edge array allowing room for new edges to be added without having to restructure the array on every edge addition.</a:t>
             </a:r>
           </a:p>
         </p:txBody>
       </p:sp>
-      <p:pic>
-        <p:nvPicPr>
-          <p:cNvPr id="11" name="Picture 10">
-            <a:extLst>
-              <a:ext uri="{FF2B5EF4-FFF2-40B4-BE49-F238E27FC236}">
-                <a16:creationId xmlns:a16="http://schemas.microsoft.com/office/drawing/2014/main" id="{F51C8DFF-8FB8-0BE1-6E3E-CD7B8116B739}"/>
-              </a:ext>
-            </a:extLst>
-          </p:cNvPr>
-          <p:cNvPicPr>
-            <a:picLocks noChangeAspect="1"/>
-          </p:cNvPicPr>
-          <p:nvPr/>
-        </p:nvPicPr>
-        <p:blipFill>
-          <a:blip r:embed="rId5"/>
-          <a:stretch>
-            <a:fillRect/>
-          </a:stretch>
-        </p:blipFill>
-        <p:spPr>
-          <a:xfrm>
-            <a:off x="8674200" y="18749469"/>
-            <a:ext cx="7479734" cy="2313051"/>
-          </a:xfrm>
-          <a:prstGeom prst="rect">
-            <a:avLst/>
-          </a:prstGeom>
-        </p:spPr>
-      </p:pic>
       <p:sp>
         <p:nvSpPr>
           <p:cNvPr id="13" name="TextBox 12">
@@ -7131,7 +7129,7 @@
           <p:nvPr>
             <p:extLst>
               <p:ext uri="{D42A27DB-BD31-4B8C-83A1-F6EECF244321}">
-                <p14:modId xmlns:p14="http://schemas.microsoft.com/office/powerpoint/2010/main" val="2568261082"/>
+                <p14:modId xmlns:p14="http://schemas.microsoft.com/office/powerpoint/2010/main" val="1771149354"/>
               </p:ext>
             </p:extLst>
           </p:nvPr>
@@ -9384,8 +9382,8 @@
         </p:nvSpPr>
         <p:spPr>
           <a:xfrm>
-            <a:off x="8727685" y="21062520"/>
-            <a:ext cx="7426249" cy="400110"/>
+            <a:off x="8727686" y="20878800"/>
+            <a:ext cx="7426248" cy="707886"/>
           </a:xfrm>
           <a:prstGeom prst="rect">
             <a:avLst/>
@@ -9426,11 +9424,1732 @@
                 <a:ea typeface="Open Sans" panose="020B0606030504020204" pitchFamily="34" charset="0"/>
                 <a:cs typeface="Open Sans" panose="020B0606030504020204" pitchFamily="34" charset="0"/>
               </a:rPr>
-              <a:t>Visual representation of a PMA</a:t>
+              <a:t>Visual representation of the backend using PMA</a:t>
             </a:r>
           </a:p>
         </p:txBody>
       </p:sp>
+      <p:sp>
+        <p:nvSpPr>
+          <p:cNvPr id="2" name="TextBox 1">
+            <a:extLst>
+              <a:ext uri="{FF2B5EF4-FFF2-40B4-BE49-F238E27FC236}">
+                <a16:creationId xmlns:a16="http://schemas.microsoft.com/office/drawing/2014/main" id="{3FC269DC-A76A-BB21-B000-D7F4DEC23497}"/>
+              </a:ext>
+            </a:extLst>
+          </p:cNvPr>
+          <p:cNvSpPr txBox="1"/>
+          <p:nvPr/>
+        </p:nvSpPr>
+        <p:spPr>
+          <a:xfrm>
+            <a:off x="24993600" y="11017862"/>
+            <a:ext cx="7192297" cy="6001643"/>
+          </a:xfrm>
+          <a:prstGeom prst="rect">
+            <a:avLst/>
+          </a:prstGeom>
+          <a:noFill/>
+        </p:spPr>
+        <p:txBody>
+          <a:bodyPr wrap="square" rtlCol="0">
+            <a:spAutoFit/>
+          </a:bodyPr>
+          <a:lstStyle>
+            <a:defPPr>
+              <a:defRPr kern="1200"/>
+            </a:defPPr>
+          </a:lstStyle>
+          <a:p>
+            <a:r>
+              <a:rPr lang="en-US" sz="2400" dirty="0">
+                <a:solidFill>
+                  <a:schemeClr val="bg2">
+                    <a:lumMod val="25000"/>
+                  </a:schemeClr>
+                </a:solidFill>
+                <a:latin typeface="Libre Baskerville" panose="02000000000000000000" pitchFamily="2" charset="0"/>
+                <a:ea typeface="Open Sans" panose="020B0606030504020204" pitchFamily="34" charset="0"/>
+                <a:cs typeface="Open Sans" panose="020B0606030504020204" pitchFamily="34" charset="0"/>
+              </a:rPr>
+              <a:t>	</a:t>
+            </a:r>
+            <a:r>
+              <a:rPr lang="en-US" sz="2400" b="1" dirty="0" err="1">
+                <a:solidFill>
+                  <a:schemeClr val="bg2">
+                    <a:lumMod val="25000"/>
+                  </a:schemeClr>
+                </a:solidFill>
+                <a:latin typeface="Libre Baskerville" panose="02000000000000000000" pitchFamily="2" charset="0"/>
+                <a:ea typeface="Open Sans" panose="020B0606030504020204" pitchFamily="34" charset="0"/>
+                <a:cs typeface="Open Sans" panose="020B0606030504020204" pitchFamily="34" charset="0"/>
+              </a:rPr>
+              <a:t>NetSim</a:t>
+            </a:r>
+            <a:r>
+              <a:rPr lang="en-US" sz="2400" dirty="0">
+                <a:solidFill>
+                  <a:schemeClr val="bg2">
+                    <a:lumMod val="25000"/>
+                  </a:schemeClr>
+                </a:solidFill>
+                <a:latin typeface="Libre Baskerville" panose="02000000000000000000" pitchFamily="2" charset="0"/>
+                <a:ea typeface="Open Sans" panose="020B0606030504020204" pitchFamily="34" charset="0"/>
+                <a:cs typeface="Open Sans" panose="020B0606030504020204" pitchFamily="34" charset="0"/>
+              </a:rPr>
+              <a:t> only scratches the surface of what a graph visualization and algorithm simulator can offer. Many additional features can be added to enhance user experience:</a:t>
+            </a:r>
+          </a:p>
+          <a:p>
+            <a:pPr marL="669432" lvl="1" indent="-342900">
+              <a:buFont typeface="Arial" panose="020B0604020202020204" pitchFamily="34" charset="0"/>
+              <a:buChar char="•"/>
+            </a:pPr>
+            <a:r>
+              <a:rPr lang="en-US" sz="2400" dirty="0">
+                <a:solidFill>
+                  <a:schemeClr val="bg2">
+                    <a:lumMod val="25000"/>
+                  </a:schemeClr>
+                </a:solidFill>
+                <a:latin typeface="Libre Baskerville" panose="02000000000000000000" pitchFamily="2" charset="0"/>
+                <a:ea typeface="Open Sans" panose="020B0606030504020204" pitchFamily="34" charset="0"/>
+                <a:cs typeface="Open Sans" panose="020B0606030504020204" pitchFamily="34" charset="0"/>
+              </a:rPr>
+              <a:t>A </a:t>
+            </a:r>
+            <a:r>
+              <a:rPr lang="en-US" sz="2400" b="1" dirty="0">
+                <a:solidFill>
+                  <a:schemeClr val="bg2">
+                    <a:lumMod val="25000"/>
+                  </a:schemeClr>
+                </a:solidFill>
+                <a:latin typeface="Libre Baskerville" panose="02000000000000000000" pitchFamily="2" charset="0"/>
+                <a:ea typeface="Open Sans" panose="020B0606030504020204" pitchFamily="34" charset="0"/>
+                <a:cs typeface="Open Sans" panose="020B0606030504020204" pitchFamily="34" charset="0"/>
+              </a:rPr>
+              <a:t>scripting</a:t>
+            </a:r>
+            <a:r>
+              <a:rPr lang="en-US" sz="2400" dirty="0">
+                <a:solidFill>
+                  <a:schemeClr val="bg2">
+                    <a:lumMod val="25000"/>
+                  </a:schemeClr>
+                </a:solidFill>
+                <a:latin typeface="Libre Baskerville" panose="02000000000000000000" pitchFamily="2" charset="0"/>
+                <a:ea typeface="Open Sans" panose="020B0606030504020204" pitchFamily="34" charset="0"/>
+                <a:cs typeface="Open Sans" panose="020B0606030504020204" pitchFamily="34" charset="0"/>
+              </a:rPr>
+              <a:t> interface so users can write and run their own algorithms </a:t>
+            </a:r>
+          </a:p>
+          <a:p>
+            <a:pPr marL="669432" lvl="1" indent="-342900">
+              <a:buFont typeface="Arial" panose="020B0604020202020204" pitchFamily="34" charset="0"/>
+              <a:buChar char="•"/>
+            </a:pPr>
+            <a:r>
+              <a:rPr lang="en-US" sz="2400" dirty="0">
+                <a:solidFill>
+                  <a:schemeClr val="bg2">
+                    <a:lumMod val="25000"/>
+                  </a:schemeClr>
+                </a:solidFill>
+                <a:latin typeface="Libre Baskerville" panose="02000000000000000000" pitchFamily="2" charset="0"/>
+                <a:ea typeface="Open Sans" panose="020B0606030504020204" pitchFamily="34" charset="0"/>
+                <a:cs typeface="Open Sans" panose="020B0606030504020204" pitchFamily="34" charset="0"/>
+              </a:rPr>
+              <a:t>Ability to </a:t>
+            </a:r>
+            <a:r>
+              <a:rPr lang="en-US" sz="2400" b="1" dirty="0">
+                <a:solidFill>
+                  <a:schemeClr val="bg2">
+                    <a:lumMod val="25000"/>
+                  </a:schemeClr>
+                </a:solidFill>
+                <a:latin typeface="Libre Baskerville" panose="02000000000000000000" pitchFamily="2" charset="0"/>
+                <a:ea typeface="Open Sans" panose="020B0606030504020204" pitchFamily="34" charset="0"/>
+                <a:cs typeface="Open Sans" panose="020B0606030504020204" pitchFamily="34" charset="0"/>
+              </a:rPr>
+              <a:t>save graphs </a:t>
+            </a:r>
+            <a:r>
+              <a:rPr lang="en-US" sz="2400" dirty="0">
+                <a:solidFill>
+                  <a:schemeClr val="bg2">
+                    <a:lumMod val="25000"/>
+                  </a:schemeClr>
+                </a:solidFill>
+                <a:latin typeface="Libre Baskerville" panose="02000000000000000000" pitchFamily="2" charset="0"/>
+                <a:ea typeface="Open Sans" panose="020B0606030504020204" pitchFamily="34" charset="0"/>
+                <a:cs typeface="Open Sans" panose="020B0606030504020204" pitchFamily="34" charset="0"/>
+              </a:rPr>
+              <a:t>and </a:t>
+            </a:r>
+            <a:r>
+              <a:rPr lang="en-US" sz="2400" b="1" dirty="0">
+                <a:solidFill>
+                  <a:schemeClr val="bg2">
+                    <a:lumMod val="25000"/>
+                  </a:schemeClr>
+                </a:solidFill>
+                <a:latin typeface="Libre Baskerville" panose="02000000000000000000" pitchFamily="2" charset="0"/>
+                <a:ea typeface="Open Sans" panose="020B0606030504020204" pitchFamily="34" charset="0"/>
+                <a:cs typeface="Open Sans" panose="020B0606030504020204" pitchFamily="34" charset="0"/>
+              </a:rPr>
+              <a:t>algorithm configurations</a:t>
+            </a:r>
+            <a:r>
+              <a:rPr lang="en-US" sz="2400" dirty="0">
+                <a:solidFill>
+                  <a:schemeClr val="bg2">
+                    <a:lumMod val="25000"/>
+                  </a:schemeClr>
+                </a:solidFill>
+                <a:latin typeface="Libre Baskerville" panose="02000000000000000000" pitchFamily="2" charset="0"/>
+                <a:ea typeface="Open Sans" panose="020B0606030504020204" pitchFamily="34" charset="0"/>
+                <a:cs typeface="Open Sans" panose="020B0606030504020204" pitchFamily="34" charset="0"/>
+              </a:rPr>
+              <a:t> as a </a:t>
+            </a:r>
+            <a:r>
+              <a:rPr lang="en-US" sz="2400" b="1" dirty="0" err="1">
+                <a:solidFill>
+                  <a:schemeClr val="bg2">
+                    <a:lumMod val="25000"/>
+                  </a:schemeClr>
+                </a:solidFill>
+                <a:latin typeface="Libre Baskerville" panose="02000000000000000000" pitchFamily="2" charset="0"/>
+                <a:ea typeface="Open Sans" panose="020B0606030504020204" pitchFamily="34" charset="0"/>
+                <a:cs typeface="Open Sans" panose="020B0606030504020204" pitchFamily="34" charset="0"/>
+              </a:rPr>
+              <a:t>NetSim</a:t>
+            </a:r>
+            <a:r>
+              <a:rPr lang="en-US" sz="2400" dirty="0">
+                <a:solidFill>
+                  <a:schemeClr val="bg2">
+                    <a:lumMod val="25000"/>
+                  </a:schemeClr>
+                </a:solidFill>
+                <a:latin typeface="Libre Baskerville" panose="02000000000000000000" pitchFamily="2" charset="0"/>
+                <a:ea typeface="Open Sans" panose="020B0606030504020204" pitchFamily="34" charset="0"/>
+                <a:cs typeface="Open Sans" panose="020B0606030504020204" pitchFamily="34" charset="0"/>
+              </a:rPr>
+              <a:t> executable allowing work to be </a:t>
+            </a:r>
+            <a:r>
+              <a:rPr lang="en-US" sz="2400" b="1" dirty="0">
+                <a:solidFill>
+                  <a:schemeClr val="bg2">
+                    <a:lumMod val="25000"/>
+                  </a:schemeClr>
+                </a:solidFill>
+                <a:latin typeface="Libre Baskerville" panose="02000000000000000000" pitchFamily="2" charset="0"/>
+                <a:ea typeface="Open Sans" panose="020B0606030504020204" pitchFamily="34" charset="0"/>
+                <a:cs typeface="Open Sans" panose="020B0606030504020204" pitchFamily="34" charset="0"/>
+              </a:rPr>
+              <a:t>resumed</a:t>
+            </a:r>
+            <a:r>
+              <a:rPr lang="en-US" sz="2400" dirty="0">
+                <a:solidFill>
+                  <a:schemeClr val="bg2">
+                    <a:lumMod val="25000"/>
+                  </a:schemeClr>
+                </a:solidFill>
+                <a:latin typeface="Libre Baskerville" panose="02000000000000000000" pitchFamily="2" charset="0"/>
+                <a:ea typeface="Open Sans" panose="020B0606030504020204" pitchFamily="34" charset="0"/>
+                <a:cs typeface="Open Sans" panose="020B0606030504020204" pitchFamily="34" charset="0"/>
+              </a:rPr>
+              <a:t> </a:t>
+            </a:r>
+          </a:p>
+          <a:p>
+            <a:pPr marL="669432" lvl="1" indent="-342900">
+              <a:buFont typeface="Arial" panose="020B0604020202020204" pitchFamily="34" charset="0"/>
+              <a:buChar char="•"/>
+            </a:pPr>
+            <a:r>
+              <a:rPr lang="en-US" sz="2400" dirty="0">
+                <a:solidFill>
+                  <a:schemeClr val="bg2">
+                    <a:lumMod val="25000"/>
+                  </a:schemeClr>
+                </a:solidFill>
+                <a:latin typeface="Libre Baskerville" panose="02000000000000000000" pitchFamily="2" charset="0"/>
+                <a:ea typeface="Open Sans" panose="020B0606030504020204" pitchFamily="34" charset="0"/>
+                <a:cs typeface="Open Sans" panose="020B0606030504020204" pitchFamily="34" charset="0"/>
+              </a:rPr>
+              <a:t>Further performance </a:t>
+            </a:r>
+            <a:r>
+              <a:rPr lang="en-US" sz="2400" b="1" dirty="0">
+                <a:solidFill>
+                  <a:schemeClr val="bg2">
+                    <a:lumMod val="25000"/>
+                  </a:schemeClr>
+                </a:solidFill>
+                <a:latin typeface="Libre Baskerville" panose="02000000000000000000" pitchFamily="2" charset="0"/>
+                <a:ea typeface="Open Sans" panose="020B0606030504020204" pitchFamily="34" charset="0"/>
+                <a:cs typeface="Open Sans" panose="020B0606030504020204" pitchFamily="34" charset="0"/>
+              </a:rPr>
+              <a:t>optimization</a:t>
+            </a:r>
+          </a:p>
+          <a:p>
+            <a:pPr marL="669432" lvl="1" indent="-342900">
+              <a:buFont typeface="Arial" panose="020B0604020202020204" pitchFamily="34" charset="0"/>
+              <a:buChar char="•"/>
+            </a:pPr>
+            <a:r>
+              <a:rPr lang="en-US" sz="2400" dirty="0">
+                <a:solidFill>
+                  <a:schemeClr val="bg2">
+                    <a:lumMod val="25000"/>
+                  </a:schemeClr>
+                </a:solidFill>
+                <a:latin typeface="Libre Baskerville" panose="02000000000000000000" pitchFamily="2" charset="0"/>
+                <a:ea typeface="Open Sans" panose="020B0606030504020204" pitchFamily="34" charset="0"/>
+                <a:cs typeface="Open Sans" panose="020B0606030504020204" pitchFamily="34" charset="0"/>
+              </a:rPr>
+              <a:t>Additional visualization algorithms to help reduce graph objects</a:t>
+            </a:r>
+          </a:p>
+          <a:p>
+            <a:pPr marL="669432" lvl="1" indent="-342900">
+              <a:buFont typeface="Arial" panose="020B0604020202020204" pitchFamily="34" charset="0"/>
+              <a:buChar char="•"/>
+            </a:pPr>
+            <a:r>
+              <a:rPr lang="en-US" sz="2400" b="1" dirty="0">
+                <a:solidFill>
+                  <a:schemeClr val="bg2">
+                    <a:lumMod val="25000"/>
+                  </a:schemeClr>
+                </a:solidFill>
+                <a:latin typeface="Libre Baskerville" panose="02000000000000000000" pitchFamily="2" charset="0"/>
+                <a:ea typeface="Open Sans" panose="020B0606030504020204" pitchFamily="34" charset="0"/>
+                <a:cs typeface="Open Sans" panose="020B0606030504020204" pitchFamily="34" charset="0"/>
+              </a:rPr>
+              <a:t>Visual paths </a:t>
+            </a:r>
+            <a:r>
+              <a:rPr lang="en-US" sz="2400" dirty="0">
+                <a:solidFill>
+                  <a:schemeClr val="bg2">
+                    <a:lumMod val="25000"/>
+                  </a:schemeClr>
+                </a:solidFill>
+                <a:latin typeface="Libre Baskerville" panose="02000000000000000000" pitchFamily="2" charset="0"/>
+                <a:ea typeface="Open Sans" panose="020B0606030504020204" pitchFamily="34" charset="0"/>
+                <a:cs typeface="Open Sans" panose="020B0606030504020204" pitchFamily="34" charset="0"/>
+              </a:rPr>
+              <a:t>shown for the search algorithms </a:t>
+            </a:r>
+          </a:p>
+          <a:p>
+            <a:pPr marL="669432" lvl="1" indent="-342900">
+              <a:buFont typeface="Arial" panose="020B0604020202020204" pitchFamily="34" charset="0"/>
+              <a:buChar char="•"/>
+            </a:pPr>
+            <a:endParaRPr lang="en-US" sz="2400" dirty="0">
+              <a:solidFill>
+                <a:schemeClr val="bg2">
+                  <a:lumMod val="25000"/>
+                </a:schemeClr>
+              </a:solidFill>
+              <a:latin typeface="Libre Baskerville" panose="02000000000000000000" pitchFamily="2" charset="0"/>
+              <a:ea typeface="Open Sans" panose="020B0606030504020204" pitchFamily="34" charset="0"/>
+              <a:cs typeface="Open Sans" panose="020B0606030504020204" pitchFamily="34" charset="0"/>
+            </a:endParaRPr>
+          </a:p>
+        </p:txBody>
+      </p:sp>
+      <p:sp>
+        <p:nvSpPr>
+          <p:cNvPr id="4" name="TextBox 3">
+            <a:extLst>
+              <a:ext uri="{FF2B5EF4-FFF2-40B4-BE49-F238E27FC236}">
+                <a16:creationId xmlns:a16="http://schemas.microsoft.com/office/drawing/2014/main" id="{2DA13806-1540-01E7-40DE-75A35DCD6735}"/>
+              </a:ext>
+            </a:extLst>
+          </p:cNvPr>
+          <p:cNvSpPr txBox="1"/>
+          <p:nvPr/>
+        </p:nvSpPr>
+        <p:spPr>
+          <a:xfrm>
+            <a:off x="16915852" y="5489292"/>
+            <a:ext cx="7192297" cy="4154984"/>
+          </a:xfrm>
+          <a:prstGeom prst="rect">
+            <a:avLst/>
+          </a:prstGeom>
+          <a:noFill/>
+        </p:spPr>
+        <p:txBody>
+          <a:bodyPr wrap="square" rtlCol="0">
+            <a:spAutoFit/>
+          </a:bodyPr>
+          <a:lstStyle>
+            <a:defPPr>
+              <a:defRPr kern="1200"/>
+            </a:defPPr>
+          </a:lstStyle>
+          <a:p>
+            <a:r>
+              <a:rPr lang="en-US" sz="2400" dirty="0">
+                <a:solidFill>
+                  <a:schemeClr val="bg2">
+                    <a:lumMod val="25000"/>
+                  </a:schemeClr>
+                </a:solidFill>
+                <a:latin typeface="Libre Baskerville" panose="02000000000000000000" pitchFamily="2" charset="0"/>
+                <a:ea typeface="Open Sans" panose="020B0606030504020204" pitchFamily="34" charset="0"/>
+                <a:cs typeface="Open Sans" panose="020B0606030504020204" pitchFamily="34" charset="0"/>
+              </a:rPr>
+              <a:t>	A large issue with graph visualization is </a:t>
+            </a:r>
+            <a:r>
+              <a:rPr lang="en-US" sz="2400" b="1" dirty="0">
+                <a:solidFill>
+                  <a:schemeClr val="bg2">
+                    <a:lumMod val="25000"/>
+                  </a:schemeClr>
+                </a:solidFill>
+                <a:latin typeface="Libre Baskerville" panose="02000000000000000000" pitchFamily="2" charset="0"/>
+                <a:ea typeface="Open Sans" panose="020B0606030504020204" pitchFamily="34" charset="0"/>
+                <a:cs typeface="Open Sans" panose="020B0606030504020204" pitchFamily="34" charset="0"/>
+              </a:rPr>
+              <a:t>scalability</a:t>
+            </a:r>
+            <a:r>
+              <a:rPr lang="en-US" sz="2400" dirty="0">
+                <a:solidFill>
+                  <a:schemeClr val="bg2">
+                    <a:lumMod val="25000"/>
+                  </a:schemeClr>
+                </a:solidFill>
+                <a:latin typeface="Libre Baskerville" panose="02000000000000000000" pitchFamily="2" charset="0"/>
+                <a:ea typeface="Open Sans" panose="020B0606030504020204" pitchFamily="34" charset="0"/>
+                <a:cs typeface="Open Sans" panose="020B0606030504020204" pitchFamily="34" charset="0"/>
+              </a:rPr>
+              <a:t>. Rendering thousands of nodes and edge simultaneously becomes slow and difficult to interpret. </a:t>
+            </a:r>
+            <a:r>
+              <a:rPr lang="en-US" sz="2400" b="1" dirty="0" err="1">
+                <a:solidFill>
+                  <a:schemeClr val="bg2">
+                    <a:lumMod val="25000"/>
+                  </a:schemeClr>
+                </a:solidFill>
+                <a:latin typeface="Libre Baskerville" panose="02000000000000000000" pitchFamily="2" charset="0"/>
+                <a:ea typeface="Open Sans" panose="020B0606030504020204" pitchFamily="34" charset="0"/>
+                <a:cs typeface="Open Sans" panose="020B0606030504020204" pitchFamily="34" charset="0"/>
+              </a:rPr>
+              <a:t>NetSim</a:t>
+            </a:r>
+            <a:r>
+              <a:rPr lang="en-US" sz="2400" dirty="0">
+                <a:solidFill>
+                  <a:schemeClr val="bg2">
+                    <a:lumMod val="25000"/>
+                  </a:schemeClr>
+                </a:solidFill>
+                <a:latin typeface="Libre Baskerville" panose="02000000000000000000" pitchFamily="2" charset="0"/>
+                <a:ea typeface="Open Sans" panose="020B0606030504020204" pitchFamily="34" charset="0"/>
+                <a:cs typeface="Open Sans" panose="020B0606030504020204" pitchFamily="34" charset="0"/>
+              </a:rPr>
+              <a:t> addresses this issue through </a:t>
+            </a:r>
+            <a:r>
+              <a:rPr lang="en-US" sz="2400" b="1" dirty="0">
+                <a:solidFill>
+                  <a:schemeClr val="bg2">
+                    <a:lumMod val="25000"/>
+                  </a:schemeClr>
+                </a:solidFill>
+                <a:latin typeface="Libre Baskerville" panose="02000000000000000000" pitchFamily="2" charset="0"/>
+                <a:ea typeface="Open Sans" panose="020B0606030504020204" pitchFamily="34" charset="0"/>
+                <a:cs typeface="Open Sans" panose="020B0606030504020204" pitchFamily="34" charset="0"/>
+              </a:rPr>
+              <a:t>node contraction </a:t>
+            </a:r>
+            <a:r>
+              <a:rPr lang="en-US" sz="2400" dirty="0">
+                <a:solidFill>
+                  <a:schemeClr val="bg2">
+                    <a:lumMod val="25000"/>
+                  </a:schemeClr>
+                </a:solidFill>
+                <a:latin typeface="Libre Baskerville" panose="02000000000000000000" pitchFamily="2" charset="0"/>
+                <a:ea typeface="Open Sans" panose="020B0606030504020204" pitchFamily="34" charset="0"/>
+                <a:cs typeface="Open Sans" panose="020B0606030504020204" pitchFamily="34" charset="0"/>
+              </a:rPr>
+              <a:t>which reduces rendered objects while still </a:t>
+            </a:r>
+            <a:r>
+              <a:rPr lang="en-US" sz="2400" b="1" dirty="0">
+                <a:solidFill>
+                  <a:schemeClr val="bg2">
+                    <a:lumMod val="25000"/>
+                  </a:schemeClr>
+                </a:solidFill>
+                <a:latin typeface="Libre Baskerville" panose="02000000000000000000" pitchFamily="2" charset="0"/>
+                <a:ea typeface="Open Sans" panose="020B0606030504020204" pitchFamily="34" charset="0"/>
+                <a:cs typeface="Open Sans" panose="020B0606030504020204" pitchFamily="34" charset="0"/>
+              </a:rPr>
+              <a:t>preserving</a:t>
+            </a:r>
+            <a:r>
+              <a:rPr lang="en-US" sz="2400" dirty="0">
+                <a:solidFill>
+                  <a:schemeClr val="bg2">
+                    <a:lumMod val="25000"/>
+                  </a:schemeClr>
+                </a:solidFill>
+                <a:latin typeface="Libre Baskerville" panose="02000000000000000000" pitchFamily="2" charset="0"/>
+                <a:ea typeface="Open Sans" panose="020B0606030504020204" pitchFamily="34" charset="0"/>
+                <a:cs typeface="Open Sans" panose="020B0606030504020204" pitchFamily="34" charset="0"/>
+              </a:rPr>
+              <a:t> the underlying graph structure. 	One contraction algorithm in </a:t>
+            </a:r>
+            <a:r>
+              <a:rPr lang="en-US" sz="2400" b="1" dirty="0" err="1">
+                <a:solidFill>
+                  <a:schemeClr val="bg2">
+                    <a:lumMod val="25000"/>
+                  </a:schemeClr>
+                </a:solidFill>
+                <a:latin typeface="Libre Baskerville" panose="02000000000000000000" pitchFamily="2" charset="0"/>
+                <a:ea typeface="Open Sans" panose="020B0606030504020204" pitchFamily="34" charset="0"/>
+                <a:cs typeface="Open Sans" panose="020B0606030504020204" pitchFamily="34" charset="0"/>
+              </a:rPr>
+              <a:t>NetSim</a:t>
+            </a:r>
+            <a:r>
+              <a:rPr lang="en-US" sz="2400" dirty="0">
+                <a:solidFill>
+                  <a:schemeClr val="bg2">
+                    <a:lumMod val="25000"/>
+                  </a:schemeClr>
+                </a:solidFill>
+                <a:latin typeface="Libre Baskerville" panose="02000000000000000000" pitchFamily="2" charset="0"/>
+                <a:ea typeface="Open Sans" panose="020B0606030504020204" pitchFamily="34" charset="0"/>
+                <a:cs typeface="Open Sans" panose="020B0606030504020204" pitchFamily="34" charset="0"/>
+              </a:rPr>
+              <a:t> selects the </a:t>
+            </a:r>
+            <a:r>
+              <a:rPr lang="en-US" sz="2400" b="1" dirty="0">
+                <a:solidFill>
+                  <a:schemeClr val="bg2">
+                    <a:lumMod val="25000"/>
+                  </a:schemeClr>
+                </a:solidFill>
+                <a:latin typeface="Libre Baskerville" panose="02000000000000000000" pitchFamily="2" charset="0"/>
+                <a:ea typeface="Open Sans" panose="020B0606030504020204" pitchFamily="34" charset="0"/>
+                <a:cs typeface="Open Sans" panose="020B0606030504020204" pitchFamily="34" charset="0"/>
+              </a:rPr>
+              <a:t>top X%</a:t>
+            </a:r>
+            <a:r>
+              <a:rPr lang="en-US" sz="2400" dirty="0">
+                <a:solidFill>
+                  <a:schemeClr val="bg2">
+                    <a:lumMod val="25000"/>
+                  </a:schemeClr>
+                </a:solidFill>
+                <a:latin typeface="Libre Baskerville" panose="02000000000000000000" pitchFamily="2" charset="0"/>
+                <a:ea typeface="Open Sans" panose="020B0606030504020204" pitchFamily="34" charset="0"/>
+                <a:cs typeface="Open Sans" panose="020B0606030504020204" pitchFamily="34" charset="0"/>
+              </a:rPr>
+              <a:t> of nodes by degree contracting </a:t>
+            </a:r>
+            <a:r>
+              <a:rPr lang="en-US" sz="2400" b="1" dirty="0">
+                <a:solidFill>
+                  <a:schemeClr val="bg2">
+                    <a:lumMod val="25000"/>
+                  </a:schemeClr>
+                </a:solidFill>
+                <a:latin typeface="Libre Baskerville" panose="02000000000000000000" pitchFamily="2" charset="0"/>
+                <a:ea typeface="Open Sans" panose="020B0606030504020204" pitchFamily="34" charset="0"/>
+                <a:cs typeface="Open Sans" panose="020B0606030504020204" pitchFamily="34" charset="0"/>
+              </a:rPr>
+              <a:t>Y hops </a:t>
+            </a:r>
+            <a:r>
+              <a:rPr lang="en-US" sz="2400" dirty="0">
+                <a:solidFill>
+                  <a:schemeClr val="bg2">
+                    <a:lumMod val="25000"/>
+                  </a:schemeClr>
+                </a:solidFill>
+                <a:latin typeface="Libre Baskerville" panose="02000000000000000000" pitchFamily="2" charset="0"/>
+                <a:ea typeface="Open Sans" panose="020B0606030504020204" pitchFamily="34" charset="0"/>
+                <a:cs typeface="Open Sans" panose="020B0606030504020204" pitchFamily="34" charset="0"/>
+              </a:rPr>
+              <a:t>outward from these nodes shown in </a:t>
+            </a:r>
+            <a:r>
+              <a:rPr lang="en-US" sz="2400" b="1" dirty="0">
+                <a:solidFill>
+                  <a:schemeClr val="bg2">
+                    <a:lumMod val="25000"/>
+                  </a:schemeClr>
+                </a:solidFill>
+                <a:latin typeface="Libre Baskerville" panose="02000000000000000000" pitchFamily="2" charset="0"/>
+                <a:ea typeface="Open Sans" panose="020B0606030504020204" pitchFamily="34" charset="0"/>
+                <a:cs typeface="Open Sans" panose="020B0606030504020204" pitchFamily="34" charset="0"/>
+              </a:rPr>
+              <a:t>Figure 3.</a:t>
+            </a:r>
+          </a:p>
+        </p:txBody>
+      </p:sp>
+      <p:pic>
+        <p:nvPicPr>
+          <p:cNvPr id="6" name="Picture 5">
+            <a:extLst>
+              <a:ext uri="{FF2B5EF4-FFF2-40B4-BE49-F238E27FC236}">
+                <a16:creationId xmlns:a16="http://schemas.microsoft.com/office/drawing/2014/main" id="{51FD22CC-D988-3686-2B05-A6805501E07D}"/>
+              </a:ext>
+            </a:extLst>
+          </p:cNvPr>
+          <p:cNvPicPr>
+            <a:picLocks noChangeAspect="1"/>
+          </p:cNvPicPr>
+          <p:nvPr/>
+        </p:nvPicPr>
+        <p:blipFill>
+          <a:blip r:embed="rId5"/>
+          <a:stretch>
+            <a:fillRect/>
+          </a:stretch>
+        </p:blipFill>
+        <p:spPr>
+          <a:xfrm>
+            <a:off x="16826586" y="9727730"/>
+            <a:ext cx="3182956" cy="3046821"/>
+          </a:xfrm>
+          <a:prstGeom prst="rect">
+            <a:avLst/>
+          </a:prstGeom>
+        </p:spPr>
+      </p:pic>
+      <p:cxnSp>
+        <p:nvCxnSpPr>
+          <p:cNvPr id="18" name="Straight Arrow Connector 17">
+            <a:extLst>
+              <a:ext uri="{FF2B5EF4-FFF2-40B4-BE49-F238E27FC236}">
+                <a16:creationId xmlns:a16="http://schemas.microsoft.com/office/drawing/2014/main" id="{392196A7-A41B-0E5C-99AB-C341A445D1A8}"/>
+              </a:ext>
+            </a:extLst>
+          </p:cNvPr>
+          <p:cNvCxnSpPr>
+            <a:cxnSpLocks/>
+            <a:stCxn id="6" idx="3"/>
+            <a:endCxn id="21" idx="1"/>
+          </p:cNvCxnSpPr>
+          <p:nvPr/>
+        </p:nvCxnSpPr>
+        <p:spPr bwMode="auto">
+          <a:xfrm>
+            <a:off x="20009542" y="11251141"/>
+            <a:ext cx="988992" cy="2332"/>
+          </a:xfrm>
+          <a:prstGeom prst="straightConnector1">
+            <a:avLst/>
+          </a:prstGeom>
+          <a:solidFill>
+            <a:schemeClr val="accent1"/>
+          </a:solidFill>
+          <a:ln w="9525" cap="flat" cmpd="sng" algn="ctr">
+            <a:solidFill>
+              <a:schemeClr val="tx1"/>
+            </a:solidFill>
+            <a:prstDash val="solid"/>
+            <a:round/>
+            <a:headEnd type="none" w="med" len="med"/>
+            <a:tailEnd type="triangle"/>
+          </a:ln>
+          <a:effectLst/>
+          <a:extLst>
+            <a:ext uri="{AF507438-7753-43E0-B8FC-AC1667EBCBE1}">
+              <a14:hiddenEffects xmlns:a14="http://schemas.microsoft.com/office/drawing/2010/main">
+                <a:effectLst>
+                  <a:outerShdw dist="35921" dir="2700000" algn="ctr" rotWithShape="0">
+                    <a:schemeClr val="bg2"/>
+                  </a:outerShdw>
+                </a:effectLst>
+              </a14:hiddenEffects>
+            </a:ext>
+          </a:extLst>
+        </p:spPr>
+      </p:cxnSp>
+      <p:pic>
+        <p:nvPicPr>
+          <p:cNvPr id="21" name="Picture 20">
+            <a:extLst>
+              <a:ext uri="{FF2B5EF4-FFF2-40B4-BE49-F238E27FC236}">
+                <a16:creationId xmlns:a16="http://schemas.microsoft.com/office/drawing/2014/main" id="{A1DAE246-E4AA-8409-0580-01D4F34A45E8}"/>
+              </a:ext>
+            </a:extLst>
+          </p:cNvPr>
+          <p:cNvPicPr>
+            <a:picLocks noChangeAspect="1"/>
+          </p:cNvPicPr>
+          <p:nvPr/>
+        </p:nvPicPr>
+        <p:blipFill>
+          <a:blip r:embed="rId6"/>
+          <a:srcRect l="1488"/>
+          <a:stretch>
+            <a:fillRect/>
+          </a:stretch>
+        </p:blipFill>
+        <p:spPr>
+          <a:xfrm>
+            <a:off x="20998534" y="9732394"/>
+            <a:ext cx="3125808" cy="3042157"/>
+          </a:xfrm>
+          <a:prstGeom prst="rect">
+            <a:avLst/>
+          </a:prstGeom>
+        </p:spPr>
+      </p:pic>
+      <p:sp>
+        <p:nvSpPr>
+          <p:cNvPr id="22" name="TextBox 21">
+            <a:extLst>
+              <a:ext uri="{FF2B5EF4-FFF2-40B4-BE49-F238E27FC236}">
+                <a16:creationId xmlns:a16="http://schemas.microsoft.com/office/drawing/2014/main" id="{2A414D88-853D-A1F4-DCDD-C5DD11A6CD45}"/>
+              </a:ext>
+            </a:extLst>
+          </p:cNvPr>
+          <p:cNvSpPr txBox="1"/>
+          <p:nvPr/>
+        </p:nvSpPr>
+        <p:spPr>
+          <a:xfrm>
+            <a:off x="16907712" y="12900716"/>
+            <a:ext cx="7426249" cy="1015663"/>
+          </a:xfrm>
+          <a:prstGeom prst="rect">
+            <a:avLst/>
+          </a:prstGeom>
+          <a:noFill/>
+        </p:spPr>
+        <p:txBody>
+          <a:bodyPr wrap="square" rtlCol="0">
+            <a:spAutoFit/>
+          </a:bodyPr>
+          <a:lstStyle>
+            <a:defPPr>
+              <a:defRPr kern="1200"/>
+            </a:defPPr>
+          </a:lstStyle>
+          <a:p>
+            <a:r>
+              <a:rPr lang="en-US" sz="2000" b="1" dirty="0">
+                <a:solidFill>
+                  <a:schemeClr val="bg2">
+                    <a:lumMod val="25000"/>
+                  </a:schemeClr>
+                </a:solidFill>
+                <a:latin typeface="Libre Baskerville" panose="02000000000000000000" pitchFamily="2" charset="0"/>
+                <a:ea typeface="Open Sans" panose="020B0606030504020204" pitchFamily="34" charset="0"/>
+                <a:cs typeface="Open Sans" panose="020B0606030504020204" pitchFamily="34" charset="0"/>
+              </a:rPr>
+              <a:t>Figure 3: </a:t>
+            </a:r>
+            <a:r>
+              <a:rPr lang="en-US" sz="2000" dirty="0">
+                <a:solidFill>
+                  <a:schemeClr val="bg2">
+                    <a:lumMod val="25000"/>
+                  </a:schemeClr>
+                </a:solidFill>
+                <a:latin typeface="Libre Baskerville" panose="02000000000000000000" pitchFamily="2" charset="0"/>
+                <a:ea typeface="Open Sans" panose="020B0606030504020204" pitchFamily="34" charset="0"/>
+                <a:cs typeface="Open Sans" panose="020B0606030504020204" pitchFamily="34" charset="0"/>
+              </a:rPr>
+              <a:t>(Right) – |V| = </a:t>
+            </a:r>
+            <a:r>
+              <a:rPr lang="en-US" sz="2000" b="1" dirty="0">
+                <a:solidFill>
+                  <a:schemeClr val="bg2">
+                    <a:lumMod val="25000"/>
+                  </a:schemeClr>
+                </a:solidFill>
+                <a:latin typeface="Libre Baskerville" panose="02000000000000000000" pitchFamily="2" charset="0"/>
+                <a:ea typeface="Open Sans" panose="020B0606030504020204" pitchFamily="34" charset="0"/>
+                <a:cs typeface="Open Sans" panose="020B0606030504020204" pitchFamily="34" charset="0"/>
+              </a:rPr>
+              <a:t>9.5k</a:t>
+            </a:r>
+            <a:r>
+              <a:rPr lang="en-US" sz="2000" dirty="0">
+                <a:solidFill>
+                  <a:schemeClr val="bg2">
+                    <a:lumMod val="25000"/>
+                  </a:schemeClr>
+                </a:solidFill>
+                <a:latin typeface="Libre Baskerville" panose="02000000000000000000" pitchFamily="2" charset="0"/>
+                <a:ea typeface="Open Sans" panose="020B0606030504020204" pitchFamily="34" charset="0"/>
+                <a:cs typeface="Open Sans" panose="020B0606030504020204" pitchFamily="34" charset="0"/>
+              </a:rPr>
+              <a:t>, |E| = </a:t>
+            </a:r>
+            <a:r>
+              <a:rPr lang="en-US" sz="2000" b="1" dirty="0">
+                <a:solidFill>
+                  <a:schemeClr val="bg2">
+                    <a:lumMod val="25000"/>
+                  </a:schemeClr>
+                </a:solidFill>
+                <a:latin typeface="Libre Baskerville" panose="02000000000000000000" pitchFamily="2" charset="0"/>
+                <a:ea typeface="Open Sans" panose="020B0606030504020204" pitchFamily="34" charset="0"/>
+                <a:cs typeface="Open Sans" panose="020B0606030504020204" pitchFamily="34" charset="0"/>
+              </a:rPr>
+              <a:t>32k</a:t>
+            </a:r>
+            <a:r>
+              <a:rPr lang="en-US" sz="2000" dirty="0">
+                <a:solidFill>
+                  <a:schemeClr val="bg2">
+                    <a:lumMod val="25000"/>
+                  </a:schemeClr>
+                </a:solidFill>
+                <a:latin typeface="Libre Baskerville" panose="02000000000000000000" pitchFamily="2" charset="0"/>
+                <a:ea typeface="Open Sans" panose="020B0606030504020204" pitchFamily="34" charset="0"/>
+                <a:cs typeface="Open Sans" panose="020B0606030504020204" pitchFamily="34" charset="0"/>
+              </a:rPr>
+              <a:t> (spiral format)</a:t>
+            </a:r>
+          </a:p>
+          <a:p>
+            <a:r>
+              <a:rPr lang="en-US" sz="2000" dirty="0">
+                <a:solidFill>
+                  <a:schemeClr val="bg2">
+                    <a:lumMod val="25000"/>
+                  </a:schemeClr>
+                </a:solidFill>
+                <a:latin typeface="Libre Baskerville" panose="02000000000000000000" pitchFamily="2" charset="0"/>
+                <a:ea typeface="Open Sans" panose="020B0606030504020204" pitchFamily="34" charset="0"/>
+                <a:cs typeface="Open Sans" panose="020B0606030504020204" pitchFamily="34" charset="0"/>
+              </a:rPr>
+              <a:t>(Left) – |V| = </a:t>
+            </a:r>
+            <a:r>
+              <a:rPr lang="en-US" sz="2000" b="1" dirty="0">
+                <a:solidFill>
+                  <a:schemeClr val="bg2">
+                    <a:lumMod val="25000"/>
+                  </a:schemeClr>
+                </a:solidFill>
+                <a:latin typeface="Libre Baskerville" panose="02000000000000000000" pitchFamily="2" charset="0"/>
+                <a:ea typeface="Open Sans" panose="020B0606030504020204" pitchFamily="34" charset="0"/>
+                <a:cs typeface="Open Sans" panose="020B0606030504020204" pitchFamily="34" charset="0"/>
+              </a:rPr>
+              <a:t>850</a:t>
+            </a:r>
+            <a:r>
+              <a:rPr lang="en-US" sz="2000" dirty="0">
+                <a:solidFill>
+                  <a:schemeClr val="bg2">
+                    <a:lumMod val="25000"/>
+                  </a:schemeClr>
+                </a:solidFill>
+                <a:latin typeface="Libre Baskerville" panose="02000000000000000000" pitchFamily="2" charset="0"/>
+                <a:ea typeface="Open Sans" panose="020B0606030504020204" pitchFamily="34" charset="0"/>
+                <a:cs typeface="Open Sans" panose="020B0606030504020204" pitchFamily="34" charset="0"/>
+              </a:rPr>
+              <a:t>, |E| = </a:t>
+            </a:r>
+            <a:r>
+              <a:rPr lang="en-US" sz="2000" b="1" dirty="0">
+                <a:solidFill>
+                  <a:schemeClr val="bg2">
+                    <a:lumMod val="25000"/>
+                  </a:schemeClr>
+                </a:solidFill>
+                <a:latin typeface="Libre Baskerville" panose="02000000000000000000" pitchFamily="2" charset="0"/>
+                <a:ea typeface="Open Sans" panose="020B0606030504020204" pitchFamily="34" charset="0"/>
+                <a:cs typeface="Open Sans" panose="020B0606030504020204" pitchFamily="34" charset="0"/>
+              </a:rPr>
+              <a:t>800</a:t>
+            </a:r>
+            <a:r>
+              <a:rPr lang="en-US" sz="2000" dirty="0">
+                <a:solidFill>
+                  <a:schemeClr val="bg2">
+                    <a:lumMod val="25000"/>
+                  </a:schemeClr>
+                </a:solidFill>
+                <a:latin typeface="Libre Baskerville" panose="02000000000000000000" pitchFamily="2" charset="0"/>
+                <a:ea typeface="Open Sans" panose="020B0606030504020204" pitchFamily="34" charset="0"/>
+                <a:cs typeface="Open Sans" panose="020B0606030504020204" pitchFamily="34" charset="0"/>
+              </a:rPr>
+              <a:t> (top 30% of nodes contracted to 1 hop, spiral format)</a:t>
+            </a:r>
+          </a:p>
+        </p:txBody>
+      </p:sp>
+      <p:sp>
+        <p:nvSpPr>
+          <p:cNvPr id="24" name="TextBox 23">
+            <a:extLst>
+              <a:ext uri="{FF2B5EF4-FFF2-40B4-BE49-F238E27FC236}">
+                <a16:creationId xmlns:a16="http://schemas.microsoft.com/office/drawing/2014/main" id="{AF8D7CF0-3177-17CF-5FE8-3A297670B3E4}"/>
+              </a:ext>
+            </a:extLst>
+          </p:cNvPr>
+          <p:cNvSpPr txBox="1"/>
+          <p:nvPr/>
+        </p:nvSpPr>
+        <p:spPr>
+          <a:xfrm>
+            <a:off x="16911263" y="13966168"/>
+            <a:ext cx="7192297" cy="6370975"/>
+          </a:xfrm>
+          <a:prstGeom prst="rect">
+            <a:avLst/>
+          </a:prstGeom>
+          <a:noFill/>
+        </p:spPr>
+        <p:txBody>
+          <a:bodyPr wrap="square" rtlCol="0">
+            <a:spAutoFit/>
+          </a:bodyPr>
+          <a:lstStyle>
+            <a:defPPr>
+              <a:defRPr kern="1200"/>
+            </a:defPPr>
+          </a:lstStyle>
+          <a:p>
+            <a:r>
+              <a:rPr lang="en-US" sz="2400" dirty="0">
+                <a:solidFill>
+                  <a:schemeClr val="bg2">
+                    <a:lumMod val="25000"/>
+                  </a:schemeClr>
+                </a:solidFill>
+                <a:latin typeface="Libre Baskerville" panose="02000000000000000000" pitchFamily="2" charset="0"/>
+                <a:ea typeface="Open Sans" panose="020B0606030504020204" pitchFamily="34" charset="0"/>
+                <a:cs typeface="Open Sans" panose="020B0606030504020204" pitchFamily="34" charset="0"/>
+              </a:rPr>
+              <a:t>	</a:t>
+            </a:r>
+            <a:r>
+              <a:rPr lang="en-US" sz="2400" dirty="0">
+                <a:solidFill>
+                  <a:schemeClr val="bg2">
+                    <a:lumMod val="25000"/>
+                  </a:schemeClr>
+                </a:solidFill>
+                <a:latin typeface="Libre Baskerville" panose="02000000000000000000" pitchFamily="2" charset="0"/>
+              </a:rPr>
+              <a:t> Another challenge is determining where to </a:t>
+            </a:r>
+            <a:r>
+              <a:rPr lang="en-US" sz="2400" b="1" dirty="0">
+                <a:solidFill>
+                  <a:schemeClr val="bg2">
+                    <a:lumMod val="25000"/>
+                  </a:schemeClr>
+                </a:solidFill>
+                <a:latin typeface="Libre Baskerville" panose="02000000000000000000" pitchFamily="2" charset="0"/>
+              </a:rPr>
+              <a:t>place nodes</a:t>
+            </a:r>
+            <a:r>
+              <a:rPr lang="en-US" sz="2400" dirty="0">
+                <a:solidFill>
+                  <a:schemeClr val="bg2">
+                    <a:lumMod val="25000"/>
+                  </a:schemeClr>
+                </a:solidFill>
+                <a:latin typeface="Libre Baskerville" panose="02000000000000000000" pitchFamily="2" charset="0"/>
+              </a:rPr>
+              <a:t>. Simple layouts such as circular or spiral arrange nodes without any awareness of graph structure. The Scalable Force-Directed Placement </a:t>
+            </a:r>
+            <a:r>
+              <a:rPr lang="en-US" sz="2400" b="1" dirty="0">
+                <a:solidFill>
+                  <a:schemeClr val="bg2">
+                    <a:lumMod val="25000"/>
+                  </a:schemeClr>
+                </a:solidFill>
+                <a:latin typeface="Libre Baskerville" panose="02000000000000000000" pitchFamily="2" charset="0"/>
+              </a:rPr>
+              <a:t>(SFDP) </a:t>
+            </a:r>
+            <a:r>
+              <a:rPr lang="en-US" sz="2400" dirty="0">
+                <a:solidFill>
+                  <a:schemeClr val="bg2">
+                    <a:lumMod val="25000"/>
+                  </a:schemeClr>
+                </a:solidFill>
+                <a:latin typeface="Libre Baskerville" panose="02000000000000000000" pitchFamily="2" charset="0"/>
+              </a:rPr>
+              <a:t>algorithm solves this by simulating physical forces, connected nodes </a:t>
+            </a:r>
+            <a:r>
+              <a:rPr lang="en-US" sz="2400" b="1" dirty="0">
+                <a:solidFill>
+                  <a:schemeClr val="bg2">
+                    <a:lumMod val="25000"/>
+                  </a:schemeClr>
+                </a:solidFill>
+                <a:latin typeface="Libre Baskerville" panose="02000000000000000000" pitchFamily="2" charset="0"/>
+              </a:rPr>
+              <a:t>attract</a:t>
+            </a:r>
+            <a:r>
+              <a:rPr lang="en-US" sz="2400" dirty="0">
+                <a:solidFill>
+                  <a:schemeClr val="bg2">
+                    <a:lumMod val="25000"/>
+                  </a:schemeClr>
+                </a:solidFill>
+                <a:latin typeface="Libre Baskerville" panose="02000000000000000000" pitchFamily="2" charset="0"/>
+              </a:rPr>
+              <a:t> while unconnected nodes </a:t>
+            </a:r>
+          </a:p>
+          <a:p>
+            <a:r>
+              <a:rPr lang="en-US" sz="2400" b="1" dirty="0">
+                <a:solidFill>
+                  <a:schemeClr val="bg2">
+                    <a:lumMod val="25000"/>
+                  </a:schemeClr>
+                </a:solidFill>
+                <a:latin typeface="Libre Baskerville" panose="02000000000000000000" pitchFamily="2" charset="0"/>
+              </a:rPr>
+              <a:t>repel</a:t>
+            </a:r>
+            <a:r>
+              <a:rPr lang="en-US" sz="2400" dirty="0">
+                <a:solidFill>
+                  <a:schemeClr val="bg2">
+                    <a:lumMod val="25000"/>
+                  </a:schemeClr>
+                </a:solidFill>
+                <a:latin typeface="Libre Baskerville" panose="02000000000000000000" pitchFamily="2" charset="0"/>
+              </a:rPr>
+              <a:t>. After many </a:t>
+            </a:r>
+          </a:p>
+          <a:p>
+            <a:r>
+              <a:rPr lang="en-US" sz="2400" dirty="0">
+                <a:solidFill>
+                  <a:schemeClr val="bg2">
+                    <a:lumMod val="25000"/>
+                  </a:schemeClr>
+                </a:solidFill>
+                <a:latin typeface="Libre Baskerville" panose="02000000000000000000" pitchFamily="2" charset="0"/>
+              </a:rPr>
+              <a:t>iterations, the graph </a:t>
+            </a:r>
+          </a:p>
+          <a:p>
+            <a:r>
+              <a:rPr lang="en-US" sz="2400" dirty="0">
+                <a:solidFill>
+                  <a:schemeClr val="bg2">
+                    <a:lumMod val="25000"/>
+                  </a:schemeClr>
+                </a:solidFill>
+                <a:latin typeface="Libre Baskerville" panose="02000000000000000000" pitchFamily="2" charset="0"/>
+              </a:rPr>
+              <a:t>reaches a state of </a:t>
+            </a:r>
+          </a:p>
+          <a:p>
+            <a:r>
+              <a:rPr lang="en-US" sz="2400" b="1" dirty="0">
+                <a:solidFill>
+                  <a:schemeClr val="bg2">
+                    <a:lumMod val="25000"/>
+                  </a:schemeClr>
+                </a:solidFill>
+                <a:latin typeface="Libre Baskerville" panose="02000000000000000000" pitchFamily="2" charset="0"/>
+              </a:rPr>
+              <a:t>equilibrium</a:t>
+            </a:r>
+            <a:r>
+              <a:rPr lang="en-US" sz="2400" dirty="0">
+                <a:solidFill>
+                  <a:schemeClr val="bg2">
+                    <a:lumMod val="25000"/>
+                  </a:schemeClr>
+                </a:solidFill>
+                <a:latin typeface="Libre Baskerville" panose="02000000000000000000" pitchFamily="2" charset="0"/>
+              </a:rPr>
+              <a:t>, naturally </a:t>
+            </a:r>
+          </a:p>
+          <a:p>
+            <a:r>
+              <a:rPr lang="en-US" sz="2400" b="1" dirty="0">
+                <a:solidFill>
+                  <a:schemeClr val="bg2">
+                    <a:lumMod val="25000"/>
+                  </a:schemeClr>
+                </a:solidFill>
+                <a:latin typeface="Libre Baskerville" panose="02000000000000000000" pitchFamily="2" charset="0"/>
+              </a:rPr>
+              <a:t>clustering</a:t>
+            </a:r>
+            <a:r>
+              <a:rPr lang="en-US" sz="2400" dirty="0">
+                <a:solidFill>
+                  <a:schemeClr val="bg2">
+                    <a:lumMod val="25000"/>
+                  </a:schemeClr>
+                </a:solidFill>
+                <a:latin typeface="Libre Baskerville" panose="02000000000000000000" pitchFamily="2" charset="0"/>
+              </a:rPr>
+              <a:t> related </a:t>
+            </a:r>
+          </a:p>
+          <a:p>
+            <a:r>
+              <a:rPr lang="en-US" sz="2400" dirty="0">
+                <a:solidFill>
+                  <a:schemeClr val="bg2">
+                    <a:lumMod val="25000"/>
+                  </a:schemeClr>
+                </a:solidFill>
+                <a:latin typeface="Libre Baskerville" panose="02000000000000000000" pitchFamily="2" charset="0"/>
+              </a:rPr>
+              <a:t>nodes together and </a:t>
+            </a:r>
+          </a:p>
+          <a:p>
+            <a:r>
+              <a:rPr lang="en-US" sz="2400" dirty="0">
+                <a:solidFill>
+                  <a:schemeClr val="bg2">
+                    <a:lumMod val="25000"/>
+                  </a:schemeClr>
+                </a:solidFill>
+                <a:latin typeface="Libre Baskerville" panose="02000000000000000000" pitchFamily="2" charset="0"/>
+              </a:rPr>
+              <a:t>making the graph’s </a:t>
+            </a:r>
+          </a:p>
+          <a:p>
+            <a:r>
+              <a:rPr lang="en-US" sz="2400" dirty="0">
+                <a:solidFill>
+                  <a:schemeClr val="bg2">
+                    <a:lumMod val="25000"/>
+                  </a:schemeClr>
+                </a:solidFill>
+                <a:latin typeface="Libre Baskerville" panose="02000000000000000000" pitchFamily="2" charset="0"/>
+              </a:rPr>
+              <a:t>structure visually</a:t>
+            </a:r>
+          </a:p>
+          <a:p>
+            <a:r>
+              <a:rPr lang="en-US" sz="2400" dirty="0">
+                <a:solidFill>
+                  <a:schemeClr val="bg2">
+                    <a:lumMod val="25000"/>
+                  </a:schemeClr>
+                </a:solidFill>
+                <a:latin typeface="Libre Baskerville" panose="02000000000000000000" pitchFamily="2" charset="0"/>
+              </a:rPr>
+              <a:t>apparent. </a:t>
+            </a:r>
+            <a:endParaRPr lang="en-US" sz="2400" dirty="0">
+              <a:solidFill>
+                <a:schemeClr val="bg2">
+                  <a:lumMod val="25000"/>
+                </a:schemeClr>
+              </a:solidFill>
+              <a:latin typeface="Libre Baskerville" panose="02000000000000000000" pitchFamily="2" charset="0"/>
+              <a:ea typeface="Open Sans" panose="020B0606030504020204" pitchFamily="34" charset="0"/>
+              <a:cs typeface="Open Sans" panose="020B0606030504020204" pitchFamily="34" charset="0"/>
+            </a:endParaRPr>
+          </a:p>
+        </p:txBody>
+      </p:sp>
+      <p:pic>
+        <p:nvPicPr>
+          <p:cNvPr id="34" name="Picture 33">
+            <a:extLst>
+              <a:ext uri="{FF2B5EF4-FFF2-40B4-BE49-F238E27FC236}">
+                <a16:creationId xmlns:a16="http://schemas.microsoft.com/office/drawing/2014/main" id="{794632F2-BC0D-130B-921E-7EAC964EAF03}"/>
+              </a:ext>
+            </a:extLst>
+          </p:cNvPr>
+          <p:cNvPicPr>
+            <a:picLocks noChangeAspect="1"/>
+          </p:cNvPicPr>
+          <p:nvPr/>
+        </p:nvPicPr>
+        <p:blipFill>
+          <a:blip r:embed="rId7"/>
+          <a:stretch>
+            <a:fillRect/>
+          </a:stretch>
+        </p:blipFill>
+        <p:spPr>
+          <a:xfrm>
+            <a:off x="20577203" y="16687800"/>
+            <a:ext cx="3654397" cy="3624294"/>
+          </a:xfrm>
+          <a:prstGeom prst="rect">
+            <a:avLst/>
+          </a:prstGeom>
+        </p:spPr>
+      </p:pic>
+      <p:sp>
+        <p:nvSpPr>
+          <p:cNvPr id="35" name="TextBox 34">
+            <a:extLst>
+              <a:ext uri="{FF2B5EF4-FFF2-40B4-BE49-F238E27FC236}">
+                <a16:creationId xmlns:a16="http://schemas.microsoft.com/office/drawing/2014/main" id="{27592291-957F-F5DB-69CC-B5F2489670CA}"/>
+              </a:ext>
+            </a:extLst>
+          </p:cNvPr>
+          <p:cNvSpPr txBox="1"/>
+          <p:nvPr/>
+        </p:nvSpPr>
+        <p:spPr>
+          <a:xfrm>
+            <a:off x="16907711" y="20475714"/>
+            <a:ext cx="7426249" cy="707886"/>
+          </a:xfrm>
+          <a:prstGeom prst="rect">
+            <a:avLst/>
+          </a:prstGeom>
+          <a:noFill/>
+        </p:spPr>
+        <p:txBody>
+          <a:bodyPr wrap="square" rtlCol="0">
+            <a:spAutoFit/>
+          </a:bodyPr>
+          <a:lstStyle>
+            <a:defPPr>
+              <a:defRPr kern="1200"/>
+            </a:defPPr>
+          </a:lstStyle>
+          <a:p>
+            <a:r>
+              <a:rPr lang="en-US" sz="2000" b="1" dirty="0">
+                <a:solidFill>
+                  <a:schemeClr val="bg2">
+                    <a:lumMod val="25000"/>
+                  </a:schemeClr>
+                </a:solidFill>
+                <a:latin typeface="Libre Baskerville" panose="02000000000000000000" pitchFamily="2" charset="0"/>
+                <a:ea typeface="Open Sans" panose="020B0606030504020204" pitchFamily="34" charset="0"/>
+                <a:cs typeface="Open Sans" panose="020B0606030504020204" pitchFamily="34" charset="0"/>
+              </a:rPr>
+              <a:t>Figure 4: </a:t>
+            </a:r>
+            <a:r>
+              <a:rPr lang="en-US" sz="2000" dirty="0">
+                <a:solidFill>
+                  <a:schemeClr val="bg2">
+                    <a:lumMod val="25000"/>
+                  </a:schemeClr>
+                </a:solidFill>
+                <a:latin typeface="Libre Baskerville" panose="02000000000000000000" pitchFamily="2" charset="0"/>
+                <a:ea typeface="Open Sans" panose="020B0606030504020204" pitchFamily="34" charset="0"/>
+                <a:cs typeface="Open Sans" panose="020B0606030504020204" pitchFamily="34" charset="0"/>
+              </a:rPr>
+              <a:t>The contracted graph from figure 3 after running the SFDP algorithm for 100 iterations</a:t>
+            </a:r>
+          </a:p>
+        </p:txBody>
+      </p:sp>
+      <p:sp>
+        <p:nvSpPr>
+          <p:cNvPr id="36" name="TextBox 35">
+            <a:extLst>
+              <a:ext uri="{FF2B5EF4-FFF2-40B4-BE49-F238E27FC236}">
+                <a16:creationId xmlns:a16="http://schemas.microsoft.com/office/drawing/2014/main" id="{1BD1D680-486C-7CFF-A076-78D2C1C2D12C}"/>
+              </a:ext>
+            </a:extLst>
+          </p:cNvPr>
+          <p:cNvSpPr txBox="1"/>
+          <p:nvPr/>
+        </p:nvSpPr>
+        <p:spPr>
+          <a:xfrm>
+            <a:off x="25055051" y="18898969"/>
+            <a:ext cx="7192297" cy="1631216"/>
+          </a:xfrm>
+          <a:prstGeom prst="rect">
+            <a:avLst/>
+          </a:prstGeom>
+          <a:noFill/>
+        </p:spPr>
+        <p:txBody>
+          <a:bodyPr wrap="square" rtlCol="0">
+            <a:spAutoFit/>
+          </a:bodyPr>
+          <a:lstStyle>
+            <a:defPPr>
+              <a:defRPr kern="1200"/>
+            </a:defPPr>
+          </a:lstStyle>
+          <a:p>
+            <a:pPr marL="342900" indent="-342900">
+              <a:buFont typeface="Arial" panose="020B0604020202020204" pitchFamily="34" charset="0"/>
+              <a:buChar char="•"/>
+            </a:pPr>
+            <a:r>
+              <a:rPr lang="en-US" sz="2000" dirty="0">
+                <a:solidFill>
+                  <a:schemeClr val="bg2">
+                    <a:lumMod val="25000"/>
+                  </a:schemeClr>
+                </a:solidFill>
+                <a:latin typeface="Libre Baskerville" panose="02000000000000000000" pitchFamily="2" charset="0"/>
+                <a:ea typeface="Open Sans" panose="020B0606030504020204" pitchFamily="34" charset="0"/>
+                <a:cs typeface="Open Sans" panose="020B0606030504020204" pitchFamily="34" charset="0"/>
+                <a:hlinkClick r:id="rId8">
+                  <a:extLst>
+                    <a:ext uri="{A12FA001-AC4F-418D-AE19-62706E023703}">
+                      <ahyp:hlinkClr xmlns:ahyp="http://schemas.microsoft.com/office/drawing/2018/hyperlinkcolor" val="tx"/>
+                    </a:ext>
+                  </a:extLst>
+                </a:hlinkClick>
+              </a:rPr>
+              <a:t>https://itshelenxu.github.io/files/papers/pcsr.pdf</a:t>
+            </a:r>
+            <a:endParaRPr lang="en-US" sz="2000" dirty="0">
+              <a:solidFill>
+                <a:schemeClr val="bg2">
+                  <a:lumMod val="25000"/>
+                </a:schemeClr>
+              </a:solidFill>
+              <a:latin typeface="Libre Baskerville" panose="02000000000000000000" pitchFamily="2" charset="0"/>
+              <a:ea typeface="Open Sans" panose="020B0606030504020204" pitchFamily="34" charset="0"/>
+              <a:cs typeface="Open Sans" panose="020B0606030504020204" pitchFamily="34" charset="0"/>
+            </a:endParaRPr>
+          </a:p>
+          <a:p>
+            <a:pPr marL="342900" indent="-342900">
+              <a:buFont typeface="Arial" panose="020B0604020202020204" pitchFamily="34" charset="0"/>
+              <a:buChar char="•"/>
+            </a:pPr>
+            <a:r>
+              <a:rPr lang="en-US" sz="2000" dirty="0">
+                <a:solidFill>
+                  <a:schemeClr val="bg2">
+                    <a:lumMod val="25000"/>
+                  </a:schemeClr>
+                </a:solidFill>
+                <a:latin typeface="Libre Baskerville" panose="02000000000000000000" pitchFamily="2" charset="0"/>
+                <a:hlinkClick r:id="rId9">
+                  <a:extLst>
+                    <a:ext uri="{A12FA001-AC4F-418D-AE19-62706E023703}">
+                      <ahyp:hlinkClr xmlns:ahyp="http://schemas.microsoft.com/office/drawing/2018/hyperlinkcolor" val="tx"/>
+                    </a:ext>
+                  </a:extLst>
+                </a:hlinkClick>
+              </a:rPr>
+              <a:t>https://networkrepository.com/bio-grid-human.php</a:t>
+            </a:r>
+            <a:endParaRPr lang="en-US" sz="2000" dirty="0">
+              <a:solidFill>
+                <a:schemeClr val="bg2">
+                  <a:lumMod val="25000"/>
+                </a:schemeClr>
+              </a:solidFill>
+              <a:latin typeface="Libre Baskerville" panose="02000000000000000000" pitchFamily="2" charset="0"/>
+            </a:endParaRPr>
+          </a:p>
+          <a:p>
+            <a:pPr marL="342900" indent="-342900">
+              <a:buFont typeface="Arial" panose="020B0604020202020204" pitchFamily="34" charset="0"/>
+              <a:buChar char="•"/>
+            </a:pPr>
+            <a:r>
+              <a:rPr lang="en-US" sz="2000" dirty="0">
+                <a:solidFill>
+                  <a:schemeClr val="bg2">
+                    <a:lumMod val="25000"/>
+                  </a:schemeClr>
+                </a:solidFill>
+                <a:latin typeface="Libre Baskerville" panose="02000000000000000000" pitchFamily="2" charset="0"/>
+                <a:ea typeface="Open Sans" panose="020B0606030504020204" pitchFamily="34" charset="0"/>
+                <a:cs typeface="Open Sans" panose="020B0606030504020204" pitchFamily="34" charset="0"/>
+                <a:hlinkClick r:id="rId10">
+                  <a:extLst>
+                    <a:ext uri="{A12FA001-AC4F-418D-AE19-62706E023703}">
+                      <ahyp:hlinkClr xmlns:ahyp="http://schemas.microsoft.com/office/drawing/2018/hyperlinkcolor" val="tx"/>
+                    </a:ext>
+                  </a:extLst>
+                </a:hlinkClick>
+              </a:rPr>
+              <a:t>http://yifanhu.net/PUB/graph_draw_small.pdf</a:t>
+            </a:r>
+            <a:endParaRPr lang="en-US" sz="2000" dirty="0">
+              <a:solidFill>
+                <a:schemeClr val="bg2">
+                  <a:lumMod val="25000"/>
+                </a:schemeClr>
+              </a:solidFill>
+              <a:latin typeface="Libre Baskerville" panose="02000000000000000000" pitchFamily="2" charset="0"/>
+              <a:ea typeface="Open Sans" panose="020B0606030504020204" pitchFamily="34" charset="0"/>
+              <a:cs typeface="Open Sans" panose="020B0606030504020204" pitchFamily="34" charset="0"/>
+            </a:endParaRPr>
+          </a:p>
+          <a:p>
+            <a:pPr marL="342900" indent="-342900">
+              <a:buFont typeface="Arial" panose="020B0604020202020204" pitchFamily="34" charset="0"/>
+              <a:buChar char="•"/>
+            </a:pPr>
+            <a:r>
+              <a:rPr lang="en-US" sz="2000" dirty="0">
+                <a:solidFill>
+                  <a:schemeClr val="bg2">
+                    <a:lumMod val="25000"/>
+                  </a:schemeClr>
+                </a:solidFill>
+                <a:latin typeface="Libre Baskerville" panose="02000000000000000000" pitchFamily="2" charset="0"/>
+                <a:ea typeface="Open Sans" panose="020B0606030504020204" pitchFamily="34" charset="0"/>
+                <a:cs typeface="Open Sans" panose="020B0606030504020204" pitchFamily="34" charset="0"/>
+              </a:rPr>
+              <a:t>https://juliagraphs.org/NetworkLayout.jl/stable/</a:t>
+            </a:r>
+          </a:p>
+        </p:txBody>
+      </p:sp>
+      <p:sp>
+        <p:nvSpPr>
+          <p:cNvPr id="37" name="TextBox 36">
+            <a:extLst>
+              <a:ext uri="{FF2B5EF4-FFF2-40B4-BE49-F238E27FC236}">
+                <a16:creationId xmlns:a16="http://schemas.microsoft.com/office/drawing/2014/main" id="{19F77BCA-F4C5-4202-D757-7017B3F265C7}"/>
+              </a:ext>
+            </a:extLst>
+          </p:cNvPr>
+          <p:cNvSpPr txBox="1"/>
+          <p:nvPr/>
+        </p:nvSpPr>
+        <p:spPr>
+          <a:xfrm>
+            <a:off x="25047782" y="5446929"/>
+            <a:ext cx="7192297" cy="4154984"/>
+          </a:xfrm>
+          <a:prstGeom prst="rect">
+            <a:avLst/>
+          </a:prstGeom>
+          <a:noFill/>
+        </p:spPr>
+        <p:txBody>
+          <a:bodyPr wrap="square" rtlCol="0">
+            <a:spAutoFit/>
+          </a:bodyPr>
+          <a:lstStyle>
+            <a:defPPr>
+              <a:defRPr kern="1200"/>
+            </a:defPPr>
+          </a:lstStyle>
+          <a:p>
+            <a:r>
+              <a:rPr lang="en-US" sz="2400" dirty="0">
+                <a:solidFill>
+                  <a:schemeClr val="bg2">
+                    <a:lumMod val="25000"/>
+                  </a:schemeClr>
+                </a:solidFill>
+                <a:latin typeface="Libre Baskerville" panose="02000000000000000000" pitchFamily="2" charset="0"/>
+              </a:rPr>
+              <a:t>	</a:t>
+            </a:r>
+            <a:r>
+              <a:rPr lang="en-US" sz="2400" b="1" dirty="0" err="1">
+                <a:solidFill>
+                  <a:schemeClr val="bg2">
+                    <a:lumMod val="25000"/>
+                  </a:schemeClr>
+                </a:solidFill>
+                <a:latin typeface="Libre Baskerville" panose="02000000000000000000" pitchFamily="2" charset="0"/>
+              </a:rPr>
+              <a:t>NetSim</a:t>
+            </a:r>
+            <a:r>
+              <a:rPr lang="en-US" sz="2400" dirty="0">
+                <a:solidFill>
+                  <a:schemeClr val="bg2">
+                    <a:lumMod val="25000"/>
+                  </a:schemeClr>
+                </a:solidFill>
+                <a:latin typeface="Libre Baskerville" panose="02000000000000000000" pitchFamily="2" charset="0"/>
+              </a:rPr>
+              <a:t> shows that interactive graph visualization can be made both through </a:t>
+            </a:r>
+            <a:r>
+              <a:rPr lang="en-US" sz="2400" b="1" dirty="0">
+                <a:solidFill>
+                  <a:schemeClr val="bg2">
+                    <a:lumMod val="25000"/>
+                  </a:schemeClr>
+                </a:solidFill>
+                <a:latin typeface="Libre Baskerville" panose="02000000000000000000" pitchFamily="2" charset="0"/>
+              </a:rPr>
+              <a:t>efficient</a:t>
+            </a:r>
+            <a:r>
+              <a:rPr lang="en-US" sz="2400" dirty="0">
+                <a:solidFill>
+                  <a:schemeClr val="bg2">
+                    <a:lumMod val="25000"/>
+                  </a:schemeClr>
+                </a:solidFill>
+                <a:latin typeface="Libre Baskerville" panose="02000000000000000000" pitchFamily="2" charset="0"/>
+              </a:rPr>
+              <a:t> graph storage and graph </a:t>
+            </a:r>
+            <a:r>
+              <a:rPr lang="en-US" sz="2400" b="1" dirty="0">
+                <a:solidFill>
+                  <a:schemeClr val="bg2">
+                    <a:lumMod val="25000"/>
+                  </a:schemeClr>
+                </a:solidFill>
+                <a:latin typeface="Libre Baskerville" panose="02000000000000000000" pitchFamily="2" charset="0"/>
+              </a:rPr>
+              <a:t>simplification</a:t>
+            </a:r>
+            <a:r>
+              <a:rPr lang="en-US" sz="2400" dirty="0">
+                <a:solidFill>
+                  <a:schemeClr val="bg2">
+                    <a:lumMod val="25000"/>
+                  </a:schemeClr>
+                </a:solidFill>
+                <a:latin typeface="Libre Baskerville" panose="02000000000000000000" pitchFamily="2" charset="0"/>
+              </a:rPr>
+              <a:t>. A </a:t>
+            </a:r>
+            <a:r>
+              <a:rPr lang="en-US" sz="2400" b="1" dirty="0">
+                <a:solidFill>
+                  <a:schemeClr val="bg2">
+                    <a:lumMod val="25000"/>
+                  </a:schemeClr>
+                </a:solidFill>
+                <a:latin typeface="Libre Baskerville" panose="02000000000000000000" pitchFamily="2" charset="0"/>
+              </a:rPr>
+              <a:t>packed memory array </a:t>
+            </a:r>
+            <a:r>
+              <a:rPr lang="en-US" sz="2400" dirty="0">
+                <a:solidFill>
+                  <a:schemeClr val="bg2">
+                    <a:lumMod val="25000"/>
+                  </a:schemeClr>
+                </a:solidFill>
+                <a:latin typeface="Libre Baskerville" panose="02000000000000000000" pitchFamily="2" charset="0"/>
+              </a:rPr>
+              <a:t>keeps memory low with fast look-up times, while </a:t>
+            </a:r>
+            <a:r>
+              <a:rPr lang="en-US" sz="2400" b="1" dirty="0">
+                <a:solidFill>
+                  <a:schemeClr val="bg2">
+                    <a:lumMod val="25000"/>
+                  </a:schemeClr>
+                </a:solidFill>
+                <a:latin typeface="Libre Baskerville" panose="02000000000000000000" pitchFamily="2" charset="0"/>
+              </a:rPr>
+              <a:t>node contraction </a:t>
+            </a:r>
+            <a:r>
+              <a:rPr lang="en-US" sz="2400" dirty="0">
+                <a:solidFill>
+                  <a:schemeClr val="bg2">
+                    <a:lumMod val="25000"/>
+                  </a:schemeClr>
+                </a:solidFill>
+                <a:latin typeface="Libre Baskerville" panose="02000000000000000000" pitchFamily="2" charset="0"/>
+              </a:rPr>
+              <a:t>and </a:t>
+            </a:r>
+            <a:r>
+              <a:rPr lang="en-US" sz="2400" b="1" dirty="0">
+                <a:solidFill>
+                  <a:schemeClr val="bg2">
+                    <a:lumMod val="25000"/>
+                  </a:schemeClr>
+                </a:solidFill>
+                <a:latin typeface="Libre Baskerville" panose="02000000000000000000" pitchFamily="2" charset="0"/>
+              </a:rPr>
+              <a:t>force-directed layout </a:t>
+            </a:r>
+            <a:r>
+              <a:rPr lang="en-US" sz="2400" dirty="0">
+                <a:solidFill>
+                  <a:schemeClr val="bg2">
+                    <a:lumMod val="25000"/>
+                  </a:schemeClr>
+                </a:solidFill>
+                <a:latin typeface="Libre Baskerville" panose="02000000000000000000" pitchFamily="2" charset="0"/>
+              </a:rPr>
+              <a:t>make large graphs </a:t>
+            </a:r>
+            <a:r>
+              <a:rPr lang="en-US" sz="2400" b="1" dirty="0">
+                <a:solidFill>
+                  <a:schemeClr val="bg2">
+                    <a:lumMod val="25000"/>
+                  </a:schemeClr>
+                </a:solidFill>
+                <a:latin typeface="Libre Baskerville" panose="02000000000000000000" pitchFamily="2" charset="0"/>
+              </a:rPr>
+              <a:t>navigable</a:t>
+            </a:r>
+            <a:r>
+              <a:rPr lang="en-US" sz="2400" dirty="0">
+                <a:solidFill>
+                  <a:schemeClr val="bg2">
+                    <a:lumMod val="25000"/>
+                  </a:schemeClr>
+                </a:solidFill>
+                <a:latin typeface="Libre Baskerville" panose="02000000000000000000" pitchFamily="2" charset="0"/>
+              </a:rPr>
+              <a:t> and </a:t>
+            </a:r>
+            <a:r>
+              <a:rPr lang="en-US" sz="2400" b="1" dirty="0">
+                <a:solidFill>
+                  <a:schemeClr val="bg2">
+                    <a:lumMod val="25000"/>
+                  </a:schemeClr>
+                </a:solidFill>
+                <a:latin typeface="Libre Baskerville" panose="02000000000000000000" pitchFamily="2" charset="0"/>
+              </a:rPr>
+              <a:t>easy to interpret</a:t>
+            </a:r>
+            <a:r>
+              <a:rPr lang="en-US" sz="2400" dirty="0">
+                <a:solidFill>
+                  <a:schemeClr val="bg2">
+                    <a:lumMod val="25000"/>
+                  </a:schemeClr>
+                </a:solidFill>
+                <a:latin typeface="Libre Baskerville" panose="02000000000000000000" pitchFamily="2" charset="0"/>
+              </a:rPr>
+              <a:t>. Though there is room for further expansion, </a:t>
+            </a:r>
+            <a:r>
+              <a:rPr lang="en-US" sz="2400" b="1" dirty="0" err="1">
+                <a:solidFill>
+                  <a:schemeClr val="bg2">
+                    <a:lumMod val="25000"/>
+                  </a:schemeClr>
+                </a:solidFill>
+                <a:latin typeface="Libre Baskerville" panose="02000000000000000000" pitchFamily="2" charset="0"/>
+              </a:rPr>
+              <a:t>NetSim</a:t>
+            </a:r>
+            <a:r>
+              <a:rPr lang="en-US" sz="2400" dirty="0">
+                <a:solidFill>
+                  <a:schemeClr val="bg2">
+                    <a:lumMod val="25000"/>
+                  </a:schemeClr>
+                </a:solidFill>
+                <a:latin typeface="Libre Baskerville" panose="02000000000000000000" pitchFamily="2" charset="0"/>
+              </a:rPr>
+              <a:t> provides a solid foundation for future research into interactive graph analysis.</a:t>
+            </a:r>
+            <a:endParaRPr lang="en-US" sz="2400" dirty="0">
+              <a:solidFill>
+                <a:schemeClr val="bg2">
+                  <a:lumMod val="25000"/>
+                </a:schemeClr>
+              </a:solidFill>
+              <a:latin typeface="Libre Baskerville" panose="02000000000000000000" pitchFamily="2" charset="0"/>
+              <a:ea typeface="Open Sans" panose="020B0606030504020204" pitchFamily="34" charset="0"/>
+              <a:cs typeface="Open Sans" panose="020B0606030504020204" pitchFamily="34" charset="0"/>
+            </a:endParaRPr>
+          </a:p>
+        </p:txBody>
+      </p:sp>
+      <p:pic>
+        <p:nvPicPr>
+          <p:cNvPr id="10" name="Picture 9">
+            <a:extLst>
+              <a:ext uri="{FF2B5EF4-FFF2-40B4-BE49-F238E27FC236}">
+                <a16:creationId xmlns:a16="http://schemas.microsoft.com/office/drawing/2014/main" id="{3D46EB5B-D249-4E04-230E-426C47398A4A}"/>
+              </a:ext>
+            </a:extLst>
+          </p:cNvPr>
+          <p:cNvPicPr>
+            <a:picLocks noChangeAspect="1"/>
+          </p:cNvPicPr>
+          <p:nvPr/>
+        </p:nvPicPr>
+        <p:blipFill>
+          <a:blip r:embed="rId11"/>
+          <a:stretch>
+            <a:fillRect/>
+          </a:stretch>
+        </p:blipFill>
+        <p:spPr>
+          <a:xfrm>
+            <a:off x="-7543800" y="10245165"/>
+            <a:ext cx="5201376" cy="2476846"/>
+          </a:xfrm>
+          <a:prstGeom prst="rect">
+            <a:avLst/>
+          </a:prstGeom>
+        </p:spPr>
+      </p:pic>
+      <p:pic>
+        <p:nvPicPr>
+          <p:cNvPr id="17" name="Picture 16">
+            <a:extLst>
+              <a:ext uri="{FF2B5EF4-FFF2-40B4-BE49-F238E27FC236}">
+                <a16:creationId xmlns:a16="http://schemas.microsoft.com/office/drawing/2014/main" id="{BEFDE619-6995-F4A7-B292-857C0AD2CAD7}"/>
+              </a:ext>
+            </a:extLst>
+          </p:cNvPr>
+          <p:cNvPicPr>
+            <a:picLocks noChangeAspect="1"/>
+          </p:cNvPicPr>
+          <p:nvPr/>
+        </p:nvPicPr>
+        <p:blipFill>
+          <a:blip r:embed="rId12"/>
+          <a:stretch>
+            <a:fillRect/>
+          </a:stretch>
+        </p:blipFill>
+        <p:spPr>
+          <a:xfrm>
+            <a:off x="9328399" y="18562291"/>
+            <a:ext cx="6030581" cy="2316509"/>
+          </a:xfrm>
+          <a:prstGeom prst="rect">
+            <a:avLst/>
+          </a:prstGeom>
+        </p:spPr>
+      </p:pic>
     </p:spTree>
   </p:cSld>
   <p:clrMapOvr>

--- a/other/MSposter.pptx
+++ b/other/MSposter.pptx
@@ -7129,7 +7129,7 @@
           <p:nvPr>
             <p:extLst>
               <p:ext uri="{D42A27DB-BD31-4B8C-83A1-F6EECF244321}">
-                <p14:modId xmlns:p14="http://schemas.microsoft.com/office/powerpoint/2010/main" val="1771149354"/>
+                <p14:modId xmlns:p14="http://schemas.microsoft.com/office/powerpoint/2010/main" val="997556569"/>
               </p:ext>
             </p:extLst>
           </p:nvPr>
@@ -9254,7 +9254,7 @@
                           </a:solidFill>
                           <a:latin typeface="Libre Baskerville" panose="02000000000000000000" pitchFamily="2" charset="0"/>
                         </a:rPr>
-                        <a:t>O(V+E)</a:t>
+                        <a:t>O(V+8E)</a:t>
                       </a:r>
                     </a:p>
                   </a:txBody>
